--- a/dist/초6/사회·역사/세계와공존/초6_사회·역사_세계와공존_02_세계의다양한문화.pptx
+++ b/dist/초6/사회·역사/세계와공존/초6_사회·역사_세계와공존_02_세계의다양한문화.pptx
@@ -121,13 +121,13 @@
   <p:extLst>
     <p:ext uri="{521415D9-36F7-43E2-AB2F-B90AF26B5E84}">
       <p14:sectionLst xmlns:p14="http://schemas.microsoft.com/office/powerpoint/2010/main">
-        <p14:section name="도입" id="{132fd2a7-9855-c748-102a-700c578826df}">
+        <p14:section name="도입" id="{d32f6a0a-5213-b675-6931-44455296795d}">
           <p14:sldIdLst>
             <p14:sldId id="256"/>
             <p14:sldId id="257"/>
           </p14:sldIdLst>
         </p14:section>
-        <p14:section name="개념" id="{296c4b1a-fe25-d441-cb6e-eaab06996097}">
+        <p14:section name="개념" id="{0b1bbd99-40ab-769b-de35-c7ad1252d145}">
           <p14:sldIdLst>
             <p14:sldId id="258"/>
             <p14:sldId id="259"/>
@@ -136,32 +136,32 @@
             <p14:sldId id="263"/>
           </p14:sldIdLst>
         </p14:section>
-        <p14:section name="연습" id="{5cd17d6e-901a-675e-8bff-39bb21db26eb}">
+        <p14:section name="연습" id="{011bb1d7-7d59-a0b1-a04c-cd9bb5227efd}">
           <p14:sldIdLst>
             <p14:sldId id="262"/>
             <p14:sldId id="264"/>
             <p14:sldId id="265"/>
           </p14:sldIdLst>
         </p14:section>
-        <p14:section name="개념" id="{0a2a114e-9fae-cc61-b990-80c49204df43}">
+        <p14:section name="개념" id="{cf15b572-45a7-b3ed-7896-6c904d4adae3}">
           <p14:sldIdLst/>
         </p14:section>
-        <p14:section name="연습" id="{51ccff64-9856-aa51-42dc-61d4270c8189}">
+        <p14:section name="연습" id="{26fa3cb6-fbcc-7d9b-327b-1007fd2202d5}">
           <p14:sldIdLst/>
         </p14:section>
-        <p14:section name="확인" id="{bc063420-2f67-8313-a277-ab9e98075821}">
+        <p14:section name="확인" id="{a29c7f13-8c13-8c43-7007-a2ceb42af817}">
           <p14:sldIdLst>
             <p14:sldId id="266"/>
             <p14:sldId id="267"/>
             <p14:sldId id="268"/>
           </p14:sldIdLst>
         </p14:section>
-        <p14:section name="정리" id="{df2be762-04d0-56d1-4d5d-7d5669737f39}">
+        <p14:section name="정리" id="{17a21b4e-87ed-3e57-ede3-ea20bfb59325}">
           <p14:sldIdLst>
             <p14:sldId id="269"/>
           </p14:sldIdLst>
         </p14:section>
-        <p14:section name="보충" id="{450c45a5-a4ae-7355-a015-01331149882a}">
+        <p14:section name="보충" id="{6e67a40e-eaba-e2e0-f1de-8adeee15fc2e}">
           <p14:sldIdLst>
             <p14:sldId id="270"/>
           </p14:sldIdLst>
@@ -1684,7 +1684,7 @@
 목적: 기후에 따라 옷과 음식도 달라졌다는 것을 세 가지 예로 알려 줍니다(목표 A).
 시간: 약 3분
 이렇게 말해 보세요
-- “덥고 건조한 곳에서는 왜 짧은 옷 대신 온몸을 덮는 옷을 입을까? 햇볕과 모래바람을 생각해 봐.”
+- “덥고 건조한 곳에서는 왜 짧은 옷 대신 온몸을 덮는 옷을 입을까? 햇볕과 모래바람을 생각해 봐. 비가 거의 없으니 먹을거리는 물이 있는 오아시스나 가축에게서 얻었어.”
 - “덥고 비가 많은 동남아시아의 많은 곳에서는 벼농사가 잘돼. 그래서 어떤 음식을 많이 먹을까?”
 - “북극 가까운 아주 추운 곳은 농사짓기가 어려워. 옛날부터 그곳의 많은 사람은 무엇을 먹고 무엇을 입었을까?”
 예상 답
@@ -1692,7 +1692,7 @@
 막히면
 - “한여름에 해변에서 햇볕을 막으려고 무엇을 입거나 쓰지?” 하고 우리 생활과 이어 묻습니다.
 주의
-- 덥고 건조한 곳의 헐렁한 옷은 햇볕과 모래바람을 막으면서 바람이 잘 통합니다. 동남아시아는 덥고 비가 많아 벼농사가 잘되고, 한 해에 벼를 두세 번 거두는 곳도 있습니다. 북극 가까운 곳은 농사가 어려워 옛날부터 사냥과 고기잡이로 먹을거리와 옷감을 얻었습니다.
+- 덥고 건조한 곳의 헐렁한 옷은 햇볕과 모래바람을 막으면서 바람이 잘 통합니다. 물이 있는 오아시스에서는 대추야자 등을 기르고, 풀과 물을 찾아 옮겨 다니며 양·염소·낙타 같은 가축을 기르기도 했습니다. 동남아시아는 덥고 비가 많아 벼농사가 잘되고, 한 해에 벼를 두세 번 거두는 곳도 있습니다. 북극 가까운 곳은 농사가 어려워 옛날부터 사냥과 고기잡이로 먹을거리와 옷감을 얻었습니다.
 - ‘그곳의 많은 사람’, ‘옛날부터’라는 말에 주의해 읽어 줍니다. 오늘날에는 같은 곳에서도 사람마다 다양하게 입고 먹습니다.</a:t>
             </a:r>
             <a:endParaRPr lang="en-US" dirty="0"/>
@@ -3327,7 +3327,7 @@
       </p:sp>
       <p:sp>
         <p:nvSpPr>
-          <p:cNvPr id="3" name="S10-text119"/>
+          <p:cNvPr id="3" name="S10-text114"/>
           <p:cNvSpPr txBox="1"/>
           <p:nvPr/>
         </p:nvSpPr>
@@ -3366,7 +3366,7 @@
       </p:sp>
       <p:sp>
         <p:nvSpPr>
-          <p:cNvPr id="4" name="S10-card120"/>
+          <p:cNvPr id="4" name="S10-card115"/>
           <p:cNvSpPr/>
           <p:nvPr/>
         </p:nvSpPr>
@@ -3393,7 +3393,7 @@
       </p:sp>
       <p:sp>
         <p:nvSpPr>
-          <p:cNvPr id="5" name="S10-cardtext121"/>
+          <p:cNvPr id="5" name="S10-cardtext116"/>
           <p:cNvSpPr txBox="1"/>
           <p:nvPr/>
         </p:nvSpPr>
@@ -3435,7 +3435,7 @@
       </p:sp>
       <p:sp>
         <p:nvSpPr>
-          <p:cNvPr id="6" name="S10-card122"/>
+          <p:cNvPr id="6" name="S10-card117"/>
           <p:cNvSpPr/>
           <p:nvPr/>
         </p:nvSpPr>
@@ -3462,7 +3462,7 @@
       </p:sp>
       <p:sp>
         <p:nvSpPr>
-          <p:cNvPr id="7" name="S10-cardtext123"/>
+          <p:cNvPr id="7" name="S10-cardtext118"/>
           <p:cNvSpPr txBox="1"/>
           <p:nvPr/>
         </p:nvSpPr>
@@ -3564,7 +3564,7 @@
       </p:sp>
       <p:sp>
         <p:nvSpPr>
-          <p:cNvPr id="8" name="S10-stepno124"/>
+          <p:cNvPr id="8" name="S10-stepno119"/>
           <p:cNvSpPr txBox="1"/>
           <p:nvPr/>
         </p:nvSpPr>
@@ -3609,7 +3609,7 @@
       </p:sp>
       <p:sp>
         <p:nvSpPr>
-          <p:cNvPr id="9" name="S10-text125"/>
+          <p:cNvPr id="9" name="S10-text120"/>
           <p:cNvSpPr txBox="1"/>
           <p:nvPr/>
         </p:nvSpPr>
@@ -3648,7 +3648,7 @@
       </p:sp>
       <p:sp>
         <p:nvSpPr>
-          <p:cNvPr id="10" name="S10-stepno126"/>
+          <p:cNvPr id="10" name="S10-stepno121"/>
           <p:cNvSpPr txBox="1"/>
           <p:nvPr/>
         </p:nvSpPr>
@@ -3693,7 +3693,7 @@
       </p:sp>
       <p:sp>
         <p:nvSpPr>
-          <p:cNvPr id="11" name="S10-text127"/>
+          <p:cNvPr id="11" name="S10-text122"/>
           <p:cNvSpPr txBox="1"/>
           <p:nvPr/>
         </p:nvSpPr>
@@ -3732,7 +3732,7 @@
       </p:sp>
       <p:sp>
         <p:nvSpPr>
-          <p:cNvPr id="12" name="S10-stepno128"/>
+          <p:cNvPr id="12" name="S10-stepno123"/>
           <p:cNvSpPr txBox="1"/>
           <p:nvPr/>
         </p:nvSpPr>
@@ -3777,7 +3777,7 @@
       </p:sp>
       <p:sp>
         <p:nvSpPr>
-          <p:cNvPr id="13" name="S10-text129"/>
+          <p:cNvPr id="13" name="S10-text124"/>
           <p:cNvSpPr txBox="1"/>
           <p:nvPr/>
         </p:nvSpPr>
@@ -3816,7 +3816,7 @@
       </p:sp>
       <p:sp>
         <p:nvSpPr>
-          <p:cNvPr id="14" name="S10-stepno130"/>
+          <p:cNvPr id="14" name="S10-stepno125"/>
           <p:cNvSpPr txBox="1"/>
           <p:nvPr/>
         </p:nvSpPr>
@@ -3861,7 +3861,7 @@
       </p:sp>
       <p:sp>
         <p:nvSpPr>
-          <p:cNvPr id="15" name="S10-text131"/>
+          <p:cNvPr id="15" name="S10-text126"/>
           <p:cNvSpPr txBox="1"/>
           <p:nvPr/>
         </p:nvSpPr>
@@ -4014,7 +4014,7 @@
       </p:sp>
       <p:sp>
         <p:nvSpPr>
-          <p:cNvPr id="3" name="S11-text132"/>
+          <p:cNvPr id="3" name="S11-text127"/>
           <p:cNvSpPr txBox="1"/>
           <p:nvPr/>
         </p:nvSpPr>
@@ -4070,7 +4070,7 @@
       </p:sp>
       <p:sp>
         <p:nvSpPr>
-          <p:cNvPr id="4" name="S11-chip133"/>
+          <p:cNvPr id="4" name="S11-chip128"/>
           <p:cNvSpPr txBox="1"/>
           <p:nvPr/>
         </p:nvSpPr>
@@ -4117,7 +4117,7 @@
       </p:sp>
       <p:sp>
         <p:nvSpPr>
-          <p:cNvPr id="5" name="S11-text134"/>
+          <p:cNvPr id="5" name="S11-text129"/>
           <p:cNvSpPr txBox="1"/>
           <p:nvPr/>
         </p:nvSpPr>
@@ -4156,7 +4156,7 @@
       </p:sp>
       <p:sp>
         <p:nvSpPr>
-          <p:cNvPr id="6" name="S11-chip135"/>
+          <p:cNvPr id="6" name="S11-chip130"/>
           <p:cNvSpPr txBox="1"/>
           <p:nvPr/>
         </p:nvSpPr>
@@ -4203,7 +4203,7 @@
       </p:sp>
       <p:sp>
         <p:nvSpPr>
-          <p:cNvPr id="7" name="S11-text136"/>
+          <p:cNvPr id="7" name="S11-text131"/>
           <p:cNvSpPr txBox="1"/>
           <p:nvPr/>
         </p:nvSpPr>
@@ -4242,7 +4242,7 @@
       </p:sp>
       <p:sp>
         <p:nvSpPr>
-          <p:cNvPr id="8" name="S11-chip137"/>
+          <p:cNvPr id="8" name="S11-chip132"/>
           <p:cNvSpPr txBox="1"/>
           <p:nvPr/>
         </p:nvSpPr>
@@ -4289,7 +4289,7 @@
       </p:sp>
       <p:sp>
         <p:nvSpPr>
-          <p:cNvPr id="9" name="S11-text138"/>
+          <p:cNvPr id="9" name="S11-text133"/>
           <p:cNvSpPr txBox="1"/>
           <p:nvPr/>
         </p:nvSpPr>
@@ -4442,7 +4442,7 @@
       </p:sp>
       <p:sp>
         <p:nvSpPr>
-          <p:cNvPr id="3" name="S12-card139"/>
+          <p:cNvPr id="3" name="S12-card134"/>
           <p:cNvSpPr/>
           <p:nvPr/>
         </p:nvSpPr>
@@ -4469,7 +4469,7 @@
       </p:sp>
       <p:sp>
         <p:nvSpPr>
-          <p:cNvPr id="4" name="S12-cardtext140"/>
+          <p:cNvPr id="4" name="S12-cardtext135"/>
           <p:cNvSpPr txBox="1"/>
           <p:nvPr/>
         </p:nvSpPr>
@@ -4511,7 +4511,7 @@
       </p:sp>
       <p:sp>
         <p:nvSpPr>
-          <p:cNvPr id="5" name="S12-chip141"/>
+          <p:cNvPr id="5" name="S12-chip136"/>
           <p:cNvSpPr txBox="1"/>
           <p:nvPr/>
         </p:nvSpPr>
@@ -4558,7 +4558,7 @@
       </p:sp>
       <p:sp>
         <p:nvSpPr>
-          <p:cNvPr id="6" name="S12-text142"/>
+          <p:cNvPr id="6" name="S12-text137"/>
           <p:cNvSpPr txBox="1"/>
           <p:nvPr/>
         </p:nvSpPr>
@@ -4614,7 +4614,7 @@
       </p:sp>
       <p:sp>
         <p:nvSpPr>
-          <p:cNvPr id="7" name="S12-text143"/>
+          <p:cNvPr id="7" name="S12-text138"/>
           <p:cNvSpPr txBox="1"/>
           <p:nvPr/>
         </p:nvSpPr>
@@ -4670,7 +4670,7 @@
       </p:sp>
       <p:sp>
         <p:nvSpPr>
-          <p:cNvPr id="8" name="S12-text144"/>
+          <p:cNvPr id="8" name="S12-text139"/>
           <p:cNvSpPr txBox="1"/>
           <p:nvPr/>
         </p:nvSpPr>
@@ -4726,7 +4726,7 @@
       </p:sp>
       <p:sp>
         <p:nvSpPr>
-          <p:cNvPr id="9" name="S12-text145"/>
+          <p:cNvPr id="9" name="S12-text140"/>
           <p:cNvSpPr txBox="1"/>
           <p:nvPr/>
         </p:nvSpPr>
@@ -4782,7 +4782,7 @@
       </p:sp>
       <p:sp>
         <p:nvSpPr>
-          <p:cNvPr id="10" name="S12-text146"/>
+          <p:cNvPr id="10" name="S12-text141"/>
           <p:cNvSpPr txBox="1"/>
           <p:nvPr/>
         </p:nvSpPr>
@@ -4838,7 +4838,7 @@
       </p:sp>
       <p:sp>
         <p:nvSpPr>
-          <p:cNvPr id="11" name="S12-chip147"/>
+          <p:cNvPr id="11" name="S12-chip142"/>
           <p:cNvSpPr txBox="1"/>
           <p:nvPr/>
         </p:nvSpPr>
@@ -4885,7 +4885,7 @@
       </p:sp>
       <p:sp>
         <p:nvSpPr>
-          <p:cNvPr id="12" name="S12-text148"/>
+          <p:cNvPr id="12" name="S12-text143"/>
           <p:cNvSpPr txBox="1"/>
           <p:nvPr/>
         </p:nvSpPr>
@@ -4941,7 +4941,7 @@
       </p:sp>
       <p:sp>
         <p:nvSpPr>
-          <p:cNvPr id="13" name="S12-text149"/>
+          <p:cNvPr id="13" name="S12-text144"/>
           <p:cNvSpPr txBox="1"/>
           <p:nvPr/>
         </p:nvSpPr>
@@ -4997,7 +4997,7 @@
       </p:sp>
       <p:sp>
         <p:nvSpPr>
-          <p:cNvPr id="14" name="S12-text150"/>
+          <p:cNvPr id="14" name="S12-text145"/>
           <p:cNvSpPr txBox="1"/>
           <p:nvPr/>
         </p:nvSpPr>
@@ -5053,7 +5053,7 @@
       </p:sp>
       <p:sp>
         <p:nvSpPr>
-          <p:cNvPr id="15" name="S12-text151"/>
+          <p:cNvPr id="15" name="S12-text146"/>
           <p:cNvSpPr txBox="1"/>
           <p:nvPr/>
         </p:nvSpPr>
@@ -5223,7 +5223,7 @@
       </p:sp>
       <p:sp>
         <p:nvSpPr>
-          <p:cNvPr id="3" name="S13-text152"/>
+          <p:cNvPr id="3" name="S13-text147"/>
           <p:cNvSpPr txBox="1"/>
           <p:nvPr/>
         </p:nvSpPr>
@@ -5279,7 +5279,7 @@
       </p:sp>
       <p:sp>
         <p:nvSpPr>
-          <p:cNvPr id="4" name="S13-chip153"/>
+          <p:cNvPr id="4" name="S13-chip148"/>
           <p:cNvSpPr txBox="1"/>
           <p:nvPr/>
         </p:nvSpPr>
@@ -5326,7 +5326,7 @@
       </p:sp>
       <p:sp>
         <p:nvSpPr>
-          <p:cNvPr id="5" name="S13-text154"/>
+          <p:cNvPr id="5" name="S13-text149"/>
           <p:cNvSpPr txBox="1"/>
           <p:nvPr/>
         </p:nvSpPr>
@@ -5365,7 +5365,7 @@
       </p:sp>
       <p:sp>
         <p:nvSpPr>
-          <p:cNvPr id="6" name="S13-chip155"/>
+          <p:cNvPr id="6" name="S13-chip150"/>
           <p:cNvSpPr txBox="1"/>
           <p:nvPr/>
         </p:nvSpPr>
@@ -5412,7 +5412,7 @@
       </p:sp>
       <p:sp>
         <p:nvSpPr>
-          <p:cNvPr id="7" name="S13-text156"/>
+          <p:cNvPr id="7" name="S13-text151"/>
           <p:cNvSpPr txBox="1"/>
           <p:nvPr/>
         </p:nvSpPr>
@@ -5451,7 +5451,7 @@
       </p:sp>
       <p:sp>
         <p:nvSpPr>
-          <p:cNvPr id="8" name="S13-chip157"/>
+          <p:cNvPr id="8" name="S13-chip152"/>
           <p:cNvSpPr txBox="1"/>
           <p:nvPr/>
         </p:nvSpPr>
@@ -5498,7 +5498,7 @@
       </p:sp>
       <p:sp>
         <p:nvSpPr>
-          <p:cNvPr id="9" name="S13-text158"/>
+          <p:cNvPr id="9" name="S13-text153"/>
           <p:cNvSpPr txBox="1"/>
           <p:nvPr/>
         </p:nvSpPr>
@@ -5651,7 +5651,7 @@
       </p:sp>
       <p:sp>
         <p:nvSpPr>
-          <p:cNvPr id="3" name="S14-card159"/>
+          <p:cNvPr id="3" name="S14-card154"/>
           <p:cNvSpPr/>
           <p:nvPr/>
         </p:nvSpPr>
@@ -5678,7 +5678,7 @@
       </p:sp>
       <p:sp>
         <p:nvSpPr>
-          <p:cNvPr id="4" name="S14-cardtext160"/>
+          <p:cNvPr id="4" name="S14-cardtext155"/>
           <p:cNvSpPr txBox="1"/>
           <p:nvPr/>
         </p:nvSpPr>
@@ -5740,7 +5740,7 @@
       </p:sp>
       <p:sp>
         <p:nvSpPr>
-          <p:cNvPr id="5" name="S14-chip161"/>
+          <p:cNvPr id="5" name="S14-chip156"/>
           <p:cNvSpPr txBox="1"/>
           <p:nvPr/>
         </p:nvSpPr>
@@ -5787,7 +5787,7 @@
       </p:sp>
       <p:sp>
         <p:nvSpPr>
-          <p:cNvPr id="6" name="S14-chip162"/>
+          <p:cNvPr id="6" name="S14-chip157"/>
           <p:cNvSpPr txBox="1"/>
           <p:nvPr/>
         </p:nvSpPr>
@@ -5834,7 +5834,7 @@
       </p:sp>
       <p:sp>
         <p:nvSpPr>
-          <p:cNvPr id="7" name="S14-text163"/>
+          <p:cNvPr id="7" name="S14-text158"/>
           <p:cNvSpPr txBox="1"/>
           <p:nvPr/>
         </p:nvSpPr>
@@ -5873,7 +5873,7 @@
       </p:sp>
       <p:sp>
         <p:nvSpPr>
-          <p:cNvPr id="8" name="S14-text164"/>
+          <p:cNvPr id="8" name="S14-text159"/>
           <p:cNvSpPr txBox="1"/>
           <p:nvPr/>
         </p:nvSpPr>
@@ -5929,7 +5929,7 @@
       </p:sp>
       <p:sp>
         <p:nvSpPr>
-          <p:cNvPr id="9" name="S14-text165"/>
+          <p:cNvPr id="9" name="S14-text160"/>
           <p:cNvSpPr txBox="1"/>
           <p:nvPr/>
         </p:nvSpPr>
@@ -5985,7 +5985,7 @@
       </p:sp>
       <p:sp>
         <p:nvSpPr>
-          <p:cNvPr id="10" name="S14-text166"/>
+          <p:cNvPr id="10" name="S14-text161"/>
           <p:cNvSpPr txBox="1"/>
           <p:nvPr/>
         </p:nvSpPr>
@@ -6041,7 +6041,7 @@
       </p:sp>
       <p:sp>
         <p:nvSpPr>
-          <p:cNvPr id="11" name="S14-text167"/>
+          <p:cNvPr id="11" name="S14-text162"/>
           <p:cNvSpPr txBox="1"/>
           <p:nvPr/>
         </p:nvSpPr>
@@ -6194,7 +6194,7 @@
       </p:sp>
       <p:sp>
         <p:nvSpPr>
-          <p:cNvPr id="3" name="S15-card168"/>
+          <p:cNvPr id="3" name="S15-card163"/>
           <p:cNvSpPr/>
           <p:nvPr/>
         </p:nvSpPr>
@@ -6221,7 +6221,7 @@
       </p:sp>
       <p:sp>
         <p:nvSpPr>
-          <p:cNvPr id="4" name="S15-cardtext169"/>
+          <p:cNvPr id="4" name="S15-cardtext164"/>
           <p:cNvSpPr txBox="1"/>
           <p:nvPr/>
         </p:nvSpPr>
@@ -6263,7 +6263,7 @@
       </p:sp>
       <p:sp>
         <p:nvSpPr>
-          <p:cNvPr id="5" name="S15-figure170" descr="간단히 나타낸 세계 지도에 적도(점선)를 그은 그림: 적도는 아프리카의 가운데와 남아메리카의 북쪽을 지나고, 아시아의 대부분은 적도의 북쪽, 오세아니아는 남쪽에 있음"/>
+          <p:cNvPr id="5" name="S15-figure165" descr="간단히 나타낸 세계 지도에 적도(점선)를 그은 그림: 적도는 아프리카의 가운데와 남아메리카의 북쪽을 지나고, 아시아의 대부분은 적도의 북쪽, 오세아니아는 남쪽에 있음"/>
           <p:cNvSpPr/>
           <p:nvPr/>
         </p:nvSpPr>
@@ -6309,7 +6309,7 @@
       </p:sp>
       <p:sp>
         <p:nvSpPr>
-          <p:cNvPr id="6" name="S15-mark171"/>
+          <p:cNvPr id="6" name="S15-mark166"/>
           <p:cNvSpPr/>
           <p:nvPr/>
         </p:nvSpPr>
@@ -6361,7 +6361,7 @@
       </p:sp>
       <p:sp>
         <p:nvSpPr>
-          <p:cNvPr id="7" name="S15-mark172"/>
+          <p:cNvPr id="7" name="S15-mark167"/>
           <p:cNvSpPr/>
           <p:nvPr/>
         </p:nvSpPr>
@@ -6434,7 +6434,7 @@
       </p:sp>
       <p:sp>
         <p:nvSpPr>
-          <p:cNvPr id="8" name="S15-mark173"/>
+          <p:cNvPr id="8" name="S15-mark168"/>
           <p:cNvSpPr/>
           <p:nvPr/>
         </p:nvSpPr>
@@ -6501,7 +6501,7 @@
       </p:sp>
       <p:sp>
         <p:nvSpPr>
-          <p:cNvPr id="9" name="S15-mark174"/>
+          <p:cNvPr id="9" name="S15-mark169"/>
           <p:cNvSpPr/>
           <p:nvPr/>
         </p:nvSpPr>
@@ -6556,7 +6556,7 @@
       </p:sp>
       <p:sp>
         <p:nvSpPr>
-          <p:cNvPr id="10" name="S15-mark175"/>
+          <p:cNvPr id="10" name="S15-mark170"/>
           <p:cNvSpPr/>
           <p:nvPr/>
         </p:nvSpPr>
@@ -6626,7 +6626,7 @@
       </p:sp>
       <p:sp>
         <p:nvSpPr>
-          <p:cNvPr id="11" name="S15-mark176"/>
+          <p:cNvPr id="11" name="S15-mark171"/>
           <p:cNvSpPr/>
           <p:nvPr/>
         </p:nvSpPr>
@@ -6690,7 +6690,7 @@
       </p:sp>
       <p:sp>
         <p:nvSpPr>
-          <p:cNvPr id="12" name="S15-mark177"/>
+          <p:cNvPr id="12" name="S15-mark172"/>
           <p:cNvSpPr/>
           <p:nvPr/>
         </p:nvSpPr>
@@ -6940,7 +6940,7 @@
       </p:sp>
       <p:sp>
         <p:nvSpPr>
-          <p:cNvPr id="13" name="S15-mark178"/>
+          <p:cNvPr id="13" name="S15-mark173"/>
           <p:cNvSpPr/>
           <p:nvPr/>
         </p:nvSpPr>
@@ -6963,7 +6963,7 @@
       </p:sp>
       <p:sp>
         <p:nvSpPr>
-          <p:cNvPr id="14" name="S15-label180"/>
+          <p:cNvPr id="14" name="S15-label175"/>
           <p:cNvSpPr txBox="1"/>
           <p:nvPr/>
         </p:nvSpPr>
@@ -7002,7 +7002,7 @@
       </p:sp>
       <p:sp>
         <p:nvSpPr>
-          <p:cNvPr id="15" name="S15-label182"/>
+          <p:cNvPr id="15" name="S15-label177"/>
           <p:cNvSpPr txBox="1"/>
           <p:nvPr/>
         </p:nvSpPr>
@@ -7041,7 +7041,7 @@
       </p:sp>
       <p:sp>
         <p:nvSpPr>
-          <p:cNvPr id="16" name="S15-label184"/>
+          <p:cNvPr id="16" name="S15-label179"/>
           <p:cNvSpPr txBox="1"/>
           <p:nvPr/>
         </p:nvSpPr>
@@ -7080,7 +7080,7 @@
       </p:sp>
       <p:sp>
         <p:nvSpPr>
-          <p:cNvPr id="17" name="S15-label186"/>
+          <p:cNvPr id="17" name="S15-label181"/>
           <p:cNvSpPr txBox="1"/>
           <p:nvPr/>
         </p:nvSpPr>
@@ -7119,7 +7119,7 @@
       </p:sp>
       <p:sp>
         <p:nvSpPr>
-          <p:cNvPr id="18" name="S15-label188"/>
+          <p:cNvPr id="18" name="S15-label183"/>
           <p:cNvSpPr txBox="1"/>
           <p:nvPr/>
         </p:nvSpPr>
@@ -7158,7 +7158,7 @@
       </p:sp>
       <p:sp>
         <p:nvSpPr>
-          <p:cNvPr id="19" name="S15-label190"/>
+          <p:cNvPr id="19" name="S15-label185"/>
           <p:cNvSpPr txBox="1"/>
           <p:nvPr/>
         </p:nvSpPr>
@@ -7197,7 +7197,7 @@
       </p:sp>
       <p:sp>
         <p:nvSpPr>
-          <p:cNvPr id="20" name="S15-label192"/>
+          <p:cNvPr id="20" name="S15-label187"/>
           <p:cNvSpPr txBox="1"/>
           <p:nvPr/>
         </p:nvSpPr>
@@ -7236,7 +7236,7 @@
       </p:sp>
       <p:sp>
         <p:nvSpPr>
-          <p:cNvPr id="21" name="S15-label194"/>
+          <p:cNvPr id="21" name="S15-label189"/>
           <p:cNvSpPr txBox="1"/>
           <p:nvPr/>
         </p:nvSpPr>
@@ -7309,7 +7309,7 @@
       </p:sp>
       <p:sp>
         <p:nvSpPr>
-          <p:cNvPr id="22" name="S15-label196"/>
+          <p:cNvPr id="22" name="S15-label191"/>
           <p:cNvSpPr txBox="1"/>
           <p:nvPr/>
         </p:nvSpPr>
@@ -7382,7 +7382,7 @@
       </p:sp>
       <p:sp>
         <p:nvSpPr>
-          <p:cNvPr id="23" name="S15-label198"/>
+          <p:cNvPr id="23" name="S15-label193"/>
           <p:cNvSpPr txBox="1"/>
           <p:nvPr/>
         </p:nvSpPr>
@@ -7421,7 +7421,7 @@
       </p:sp>
       <p:sp>
         <p:nvSpPr>
-          <p:cNvPr id="24" name="S15-label200"/>
+          <p:cNvPr id="24" name="S15-label195"/>
           <p:cNvSpPr txBox="1"/>
           <p:nvPr/>
         </p:nvSpPr>
@@ -7460,7 +7460,7 @@
       </p:sp>
       <p:sp>
         <p:nvSpPr>
-          <p:cNvPr id="25" name="S15-label202"/>
+          <p:cNvPr id="25" name="S15-label197"/>
           <p:cNvSpPr txBox="1"/>
           <p:nvPr/>
         </p:nvSpPr>
@@ -7499,13 +7499,13 @@
       </p:sp>
       <p:sp>
         <p:nvSpPr>
-          <p:cNvPr id="26" name="S15-labelbg204"/>
+          <p:cNvPr id="26" name="S15-labelbg199"/>
           <p:cNvSpPr/>
           <p:nvPr/>
         </p:nvSpPr>
         <p:spPr>
           <a:xfrm>
-            <a:off x="6637029" y="3493287"/>
+            <a:off x="5011701" y="3253182"/>
             <a:ext cx="466344" cy="228600"/>
           </a:xfrm>
           <a:prstGeom prst="rect">
@@ -7519,13 +7519,13 @@
       </p:sp>
       <p:sp>
         <p:nvSpPr>
-          <p:cNvPr id="27" name="S15-label205"/>
+          <p:cNvPr id="27" name="S15-label200"/>
           <p:cNvSpPr txBox="1"/>
           <p:nvPr/>
         </p:nvSpPr>
         <p:spPr>
           <a:xfrm>
-            <a:off x="6591309" y="3464712"/>
+            <a:off x="4965981" y="3224607"/>
             <a:ext cx="557784" cy="285750"/>
           </a:xfrm>
           <a:prstGeom prst="rect">
@@ -7558,7 +7558,7 @@
       </p:sp>
       <p:sp>
         <p:nvSpPr>
-          <p:cNvPr id="28" name="S15-label206"/>
+          <p:cNvPr id="28" name="S15-label201"/>
           <p:cNvSpPr txBox="1"/>
           <p:nvPr/>
         </p:nvSpPr>
@@ -9917,12 +9917,12 @@
         </p:nvSpPr>
         <p:spPr>
           <a:xfrm>
-            <a:off x="548640" y="4153408"/>
-            <a:ext cx="3544824" cy="2064512"/>
+            <a:off x="548640" y="5021072"/>
+            <a:ext cx="3544824" cy="1196848"/>
           </a:xfrm>
           <a:prstGeom prst="roundRect">
             <a:avLst>
-              <a:gd name="adj" fmla="val 5315"/>
+              <a:gd name="adj" fmla="val 9168"/>
             </a:avLst>
           </a:prstGeom>
           <a:solidFill>
@@ -9944,8 +9944,8 @@
         </p:nvSpPr>
         <p:spPr>
           <a:xfrm>
-            <a:off x="822960" y="4290568"/>
-            <a:ext cx="2996184" cy="1790192"/>
+            <a:off x="822960" y="5158232"/>
+            <a:ext cx="2996184" cy="922528"/>
           </a:xfrm>
           <a:prstGeom prst="rect">
             <a:avLst/>
@@ -9972,7 +9972,7 @@
                 <a:ea typeface="맑은 고딕" pitchFamily="34" charset="-122"/>
                 <a:cs typeface="맑은 고딕" pitchFamily="34" charset="-120"/>
               </a:rPr>
-              <a:t>흙벽돌로 벽을 두껍게,</a:t>
+              <a:t>두꺼운 흙벽,</a:t>
             </a:r>
             <a:endParaRPr lang="ko-KR" sz="2800" dirty="0"/>
           </a:p>
@@ -9992,7 +9992,7 @@
                 <a:ea typeface="맑은 고딕" pitchFamily="34" charset="-122"/>
                 <a:cs typeface="맑은 고딕" pitchFamily="34" charset="-120"/>
               </a:rPr>
-              <a:t>창문은 작게 지어요.</a:t>
+              <a:t>작은 창문</a:t>
             </a:r>
             <a:endParaRPr lang="ko-KR" sz="2800" dirty="0"/>
           </a:p>
@@ -10006,12 +10006,12 @@
         </p:nvSpPr>
         <p:spPr>
           <a:xfrm>
-            <a:off x="4322064" y="4153408"/>
-            <a:ext cx="3544824" cy="2064512"/>
+            <a:off x="4322064" y="5021072"/>
+            <a:ext cx="3544824" cy="1196848"/>
           </a:xfrm>
           <a:prstGeom prst="roundRect">
             <a:avLst>
-              <a:gd name="adj" fmla="val 5315"/>
+              <a:gd name="adj" fmla="val 9168"/>
             </a:avLst>
           </a:prstGeom>
           <a:solidFill>
@@ -10033,8 +10033,8 @@
         </p:nvSpPr>
         <p:spPr>
           <a:xfrm>
-            <a:off x="4596384" y="4290568"/>
-            <a:ext cx="2996184" cy="1790192"/>
+            <a:off x="4596384" y="5158232"/>
+            <a:ext cx="2996184" cy="922528"/>
           </a:xfrm>
           <a:prstGeom prst="rect">
             <a:avLst/>
@@ -10061,7 +10061,7 @@
                 <a:ea typeface="맑은 고딕" pitchFamily="34" charset="-122"/>
                 <a:cs typeface="맑은 고딕" pitchFamily="34" charset="-120"/>
               </a:rPr>
-              <a:t>땅에서 띄워 짓고,</a:t>
+              <a:t>땅에서 띄운 집,</a:t>
             </a:r>
             <a:endParaRPr lang="ko-KR" sz="2800" dirty="0"/>
           </a:p>
@@ -10081,7 +10081,7 @@
                 <a:ea typeface="맑은 고딕" pitchFamily="34" charset="-122"/>
                 <a:cs typeface="맑은 고딕" pitchFamily="34" charset="-120"/>
               </a:rPr>
-              <a:t>지붕은 가파르게 해요.</a:t>
+              <a:t>가파른 지붕</a:t>
             </a:r>
             <a:endParaRPr lang="ko-KR" sz="2800" dirty="0"/>
           </a:p>
@@ -10095,12 +10095,12 @@
         </p:nvSpPr>
         <p:spPr>
           <a:xfrm>
-            <a:off x="8095488" y="4153408"/>
-            <a:ext cx="3544824" cy="2064512"/>
+            <a:off x="8095488" y="5021072"/>
+            <a:ext cx="3544824" cy="1196848"/>
           </a:xfrm>
           <a:prstGeom prst="roundRect">
             <a:avLst>
-              <a:gd name="adj" fmla="val 5315"/>
+              <a:gd name="adj" fmla="val 9168"/>
             </a:avLst>
           </a:prstGeom>
           <a:solidFill>
@@ -10122,8 +10122,8 @@
         </p:nvSpPr>
         <p:spPr>
           <a:xfrm>
-            <a:off x="8369808" y="4290568"/>
-            <a:ext cx="2996184" cy="1790192"/>
+            <a:off x="8369808" y="5158232"/>
+            <a:ext cx="2996184" cy="922528"/>
           </a:xfrm>
           <a:prstGeom prst="rect">
             <a:avLst/>
@@ -10150,7 +10150,7 @@
                 <a:ea typeface="맑은 고딕" pitchFamily="34" charset="-122"/>
                 <a:cs typeface="맑은 고딕" pitchFamily="34" charset="-120"/>
               </a:rPr>
-              <a:t>통나무 벽을 두껍게,</a:t>
+              <a:t>두꺼운 나무 벽,</a:t>
             </a:r>
             <a:endParaRPr lang="ko-KR" sz="2800" dirty="0"/>
           </a:p>
@@ -10170,7 +10170,7 @@
                 <a:ea typeface="맑은 고딕" pitchFamily="34" charset="-122"/>
                 <a:cs typeface="맑은 고딕" pitchFamily="34" charset="-120"/>
               </a:rPr>
-              <a:t>창은 작게 지어요.</a:t>
+              <a:t>작은 창</a:t>
             </a:r>
             <a:endParaRPr lang="ko-KR" sz="2800" dirty="0"/>
           </a:p>
@@ -10184,8 +10184,8 @@
         </p:nvSpPr>
         <p:spPr>
           <a:xfrm>
-            <a:off x="1037666" y="3255197"/>
-            <a:ext cx="2505812" cy="135449"/>
+            <a:off x="632460" y="3965554"/>
+            <a:ext cx="3316224" cy="179255"/>
           </a:xfrm>
           <a:custGeom>
             <a:avLst/>
@@ -10194,15 +10194,15 @@
             <a:cxnLst/>
             <a:rect l="l" t="t" r="r" b="b"/>
             <a:pathLst>
-              <a:path w="2505812" h="135449">
+              <a:path w="3316224" h="179255">
                 <a:moveTo>
-                  <a:pt x="0" y="135449"/>
+                  <a:pt x="0" y="179255"/>
                 </a:moveTo>
                 <a:lnTo>
-                  <a:pt x="2505812" y="135449"/>
-                </a:lnTo>
-                <a:lnTo>
-                  <a:pt x="2505812" y="0"/>
+                  <a:pt x="3316224" y="179255"/>
+                </a:lnTo>
+                <a:lnTo>
+                  <a:pt x="3316224" y="0"/>
                 </a:lnTo>
                 <a:lnTo>
                   <a:pt x="0" y="0"/>
@@ -10225,8 +10225,8 @@
         </p:nvSpPr>
         <p:spPr>
           <a:xfrm>
-            <a:off x="1308565" y="2239327"/>
-            <a:ext cx="1693116" cy="1015870"/>
+            <a:off x="990971" y="2621139"/>
+            <a:ext cx="2240692" cy="1344415"/>
           </a:xfrm>
           <a:custGeom>
             <a:avLst/>
@@ -10235,15 +10235,15 @@
             <a:cxnLst/>
             <a:rect l="l" t="t" r="r" b="b"/>
             <a:pathLst>
-              <a:path w="1693116" h="1015870">
+              <a:path w="2240692" h="1344415">
                 <a:moveTo>
-                  <a:pt x="0" y="1015870"/>
+                  <a:pt x="0" y="1344415"/>
                 </a:moveTo>
                 <a:lnTo>
-                  <a:pt x="1693116" y="1015870"/>
-                </a:lnTo>
-                <a:lnTo>
-                  <a:pt x="1693116" y="0"/>
+                  <a:pt x="2240692" y="1344415"/>
+                </a:lnTo>
+                <a:lnTo>
+                  <a:pt x="2240692" y="0"/>
                 </a:lnTo>
                 <a:lnTo>
                   <a:pt x="0" y="0"/>
@@ -10271,8 +10271,8 @@
         </p:nvSpPr>
         <p:spPr>
           <a:xfrm>
-            <a:off x="1223909" y="2086946"/>
-            <a:ext cx="1862428" cy="152380"/>
+            <a:off x="878936" y="2419477"/>
+            <a:ext cx="2464761" cy="201662"/>
           </a:xfrm>
           <a:custGeom>
             <a:avLst/>
@@ -10281,15 +10281,15 @@
             <a:cxnLst/>
             <a:rect l="l" t="t" r="r" b="b"/>
             <a:pathLst>
-              <a:path w="1862428" h="152380">
+              <a:path w="2464761" h="201662">
                 <a:moveTo>
-                  <a:pt x="0" y="152380"/>
+                  <a:pt x="0" y="201662"/>
                 </a:moveTo>
                 <a:lnTo>
-                  <a:pt x="1862428" y="152380"/>
-                </a:lnTo>
-                <a:lnTo>
-                  <a:pt x="1862428" y="0"/>
+                  <a:pt x="2464761" y="201662"/>
+                </a:lnTo>
+                <a:lnTo>
+                  <a:pt x="2464761" y="0"/>
                 </a:lnTo>
                 <a:lnTo>
                   <a:pt x="0" y="0"/>
@@ -10317,8 +10317,8 @@
         </p:nvSpPr>
         <p:spPr>
           <a:xfrm>
-            <a:off x="1613326" y="2442501"/>
-            <a:ext cx="186243" cy="169312"/>
+            <a:off x="1394295" y="2890022"/>
+            <a:ext cx="246476" cy="224069"/>
           </a:xfrm>
           <a:custGeom>
             <a:avLst/>
@@ -10327,15 +10327,15 @@
             <a:cxnLst/>
             <a:rect l="l" t="t" r="r" b="b"/>
             <a:pathLst>
-              <a:path w="186243" h="169312">
+              <a:path w="246476" h="224069">
                 <a:moveTo>
-                  <a:pt x="0" y="169312"/>
+                  <a:pt x="0" y="224069"/>
                 </a:moveTo>
                 <a:lnTo>
-                  <a:pt x="186243" y="169312"/>
-                </a:lnTo>
-                <a:lnTo>
-                  <a:pt x="186243" y="0"/>
+                  <a:pt x="246476" y="224069"/>
+                </a:lnTo>
+                <a:lnTo>
+                  <a:pt x="246476" y="0"/>
                 </a:lnTo>
                 <a:lnTo>
                   <a:pt x="0" y="0"/>
@@ -10363,8 +10363,8 @@
         </p:nvSpPr>
         <p:spPr>
           <a:xfrm>
-            <a:off x="2510677" y="2442501"/>
-            <a:ext cx="186243" cy="169312"/>
+            <a:off x="2581862" y="2890022"/>
+            <a:ext cx="246476" cy="224069"/>
           </a:xfrm>
           <a:custGeom>
             <a:avLst/>
@@ -10373,15 +10373,15 @@
             <a:cxnLst/>
             <a:rect l="l" t="t" r="r" b="b"/>
             <a:pathLst>
-              <a:path w="186243" h="169312">
+              <a:path w="246476" h="224069">
                 <a:moveTo>
-                  <a:pt x="0" y="169312"/>
+                  <a:pt x="0" y="224069"/>
                 </a:moveTo>
                 <a:lnTo>
-                  <a:pt x="186243" y="169312"/>
-                </a:lnTo>
-                <a:lnTo>
-                  <a:pt x="186243" y="0"/>
+                  <a:pt x="246476" y="224069"/>
+                </a:lnTo>
+                <a:lnTo>
+                  <a:pt x="246476" y="0"/>
                 </a:lnTo>
                 <a:lnTo>
                   <a:pt x="0" y="0"/>
@@ -10409,8 +10409,8 @@
         </p:nvSpPr>
         <p:spPr>
           <a:xfrm>
-            <a:off x="2019673" y="2747262"/>
-            <a:ext cx="270899" cy="507935"/>
+            <a:off x="1932061" y="3293347"/>
+            <a:ext cx="358511" cy="672208"/>
           </a:xfrm>
           <a:custGeom>
             <a:avLst/>
@@ -10419,15 +10419,15 @@
             <a:cxnLst/>
             <a:rect l="l" t="t" r="r" b="b"/>
             <a:pathLst>
-              <a:path w="270899" h="507935">
+              <a:path w="358511" h="672208">
                 <a:moveTo>
-                  <a:pt x="0" y="507935"/>
+                  <a:pt x="0" y="672208"/>
                 </a:moveTo>
                 <a:lnTo>
-                  <a:pt x="270899" y="507935"/>
-                </a:lnTo>
-                <a:lnTo>
-                  <a:pt x="270899" y="0"/>
+                  <a:pt x="358511" y="672208"/>
+                </a:lnTo>
+                <a:lnTo>
+                  <a:pt x="358511" y="0"/>
                 </a:lnTo>
                 <a:lnTo>
                   <a:pt x="0" y="0"/>
@@ -10455,8 +10455,8 @@
         </p:nvSpPr>
         <p:spPr>
           <a:xfrm>
-            <a:off x="3035543" y="1528218"/>
-            <a:ext cx="338623" cy="338623"/>
+            <a:off x="3276476" y="1680049"/>
+            <a:ext cx="448138" cy="448138"/>
           </a:xfrm>
           <a:prstGeom prst="ellipse">
             <a:avLst/>
@@ -10480,8 +10480,8 @@
         </p:nvSpPr>
         <p:spPr>
           <a:xfrm flipH="1">
-            <a:off x="2815438" y="1697530"/>
-            <a:ext cx="101587" cy="0"/>
+            <a:off x="2985186" y="1904118"/>
+            <a:ext cx="134442" cy="0"/>
           </a:xfrm>
           <a:prstGeom prst="line">
             <a:avLst/>
@@ -10503,8 +10503,8 @@
         </p:nvSpPr>
         <p:spPr>
           <a:xfrm flipH="1">
-            <a:off x="2917025" y="1900704"/>
-            <a:ext cx="84656" cy="84656"/>
+            <a:off x="3119628" y="2173001"/>
+            <a:ext cx="112035" cy="112035"/>
           </a:xfrm>
           <a:prstGeom prst="line">
             <a:avLst/>
@@ -10526,8 +10526,8 @@
         </p:nvSpPr>
         <p:spPr>
           <a:xfrm>
-            <a:off x="3204855" y="1985360"/>
-            <a:ext cx="0" cy="84656"/>
+            <a:off x="3500546" y="2285035"/>
+            <a:ext cx="0" cy="112035"/>
           </a:xfrm>
           <a:prstGeom prst="line">
             <a:avLst/>
@@ -10549,8 +10549,8 @@
         </p:nvSpPr>
         <p:spPr>
           <a:xfrm flipH="1" flipV="1">
-            <a:off x="2917025" y="1409700"/>
-            <a:ext cx="84656" cy="84656"/>
+            <a:off x="3119628" y="1523200"/>
+            <a:ext cx="112035" cy="112035"/>
           </a:xfrm>
           <a:prstGeom prst="line">
             <a:avLst/>
@@ -10572,7 +10572,7 @@
         </p:nvSpPr>
         <p:spPr>
           <a:xfrm>
-            <a:off x="548640" y="3547618"/>
+            <a:off x="548640" y="4415282"/>
             <a:ext cx="3483864" cy="377190"/>
           </a:xfrm>
           <a:prstGeom prst="rect">
@@ -10611,8 +10611,8 @@
         </p:nvSpPr>
         <p:spPr>
           <a:xfrm>
-            <a:off x="5133135" y="3274120"/>
-            <a:ext cx="1922683" cy="116526"/>
+            <a:off x="4712062" y="4090745"/>
+            <a:ext cx="2764827" cy="167565"/>
           </a:xfrm>
           <a:custGeom>
             <a:avLst/>
@@ -10621,15 +10621,15 @@
             <a:cxnLst/>
             <a:rect l="l" t="t" r="r" b="b"/>
             <a:pathLst>
-              <a:path w="1922683" h="116526">
+              <a:path w="2764827" h="167565">
                 <a:moveTo>
-                  <a:pt x="0" y="116526"/>
+                  <a:pt x="0" y="167565"/>
                 </a:moveTo>
                 <a:lnTo>
-                  <a:pt x="1922683" y="116526"/>
-                </a:lnTo>
-                <a:lnTo>
-                  <a:pt x="1922683" y="0"/>
+                  <a:pt x="2764827" y="167565"/>
+                </a:lnTo>
+                <a:lnTo>
+                  <a:pt x="2764827" y="0"/>
                 </a:lnTo>
                 <a:lnTo>
                   <a:pt x="0" y="0"/>
@@ -10652,8 +10652,8 @@
         </p:nvSpPr>
         <p:spPr>
           <a:xfrm>
-            <a:off x="5337055" y="2778883"/>
-            <a:ext cx="1514841" cy="87395"/>
+            <a:off x="5005302" y="3378592"/>
+            <a:ext cx="2178349" cy="125674"/>
           </a:xfrm>
           <a:custGeom>
             <a:avLst/>
@@ -10662,15 +10662,15 @@
             <a:cxnLst/>
             <a:rect l="l" t="t" r="r" b="b"/>
             <a:pathLst>
-              <a:path w="1514841" h="87395">
+              <a:path w="2178349" h="125674">
                 <a:moveTo>
-                  <a:pt x="0" y="87395"/>
+                  <a:pt x="0" y="125674"/>
                 </a:moveTo>
                 <a:lnTo>
-                  <a:pt x="1514841" y="87395"/>
-                </a:lnTo>
-                <a:lnTo>
-                  <a:pt x="1514841" y="0"/>
+                  <a:pt x="2178349" y="125674"/>
+                </a:lnTo>
+                <a:lnTo>
+                  <a:pt x="2178349" y="0"/>
                 </a:lnTo>
                 <a:lnTo>
                   <a:pt x="0" y="0"/>
@@ -10698,8 +10698,8 @@
         </p:nvSpPr>
         <p:spPr>
           <a:xfrm>
-            <a:off x="5482713" y="2371041"/>
-            <a:ext cx="1223525" cy="407842"/>
+            <a:off x="5214758" y="2792114"/>
+            <a:ext cx="1759436" cy="586479"/>
           </a:xfrm>
           <a:custGeom>
             <a:avLst/>
@@ -10708,15 +10708,15 @@
             <a:cxnLst/>
             <a:rect l="l" t="t" r="r" b="b"/>
             <a:pathLst>
-              <a:path w="1223525" h="407842">
+              <a:path w="1759436" h="586479">
                 <a:moveTo>
-                  <a:pt x="0" y="407842"/>
+                  <a:pt x="0" y="586479"/>
                 </a:moveTo>
                 <a:lnTo>
-                  <a:pt x="1223525" y="407842"/>
-                </a:lnTo>
-                <a:lnTo>
-                  <a:pt x="1223525" y="0"/>
+                  <a:pt x="1759436" y="586479"/>
+                </a:lnTo>
+                <a:lnTo>
+                  <a:pt x="1759436" y="0"/>
                 </a:lnTo>
                 <a:lnTo>
                   <a:pt x="0" y="0"/>
@@ -10744,8 +10744,8 @@
         </p:nvSpPr>
         <p:spPr>
           <a:xfrm>
-            <a:off x="5220529" y="1671884"/>
-            <a:ext cx="1747894" cy="699157"/>
+            <a:off x="4837736" y="1786722"/>
+            <a:ext cx="2513479" cy="1005392"/>
           </a:xfrm>
           <a:custGeom>
             <a:avLst/>
@@ -10754,15 +10754,15 @@
             <a:cxnLst/>
             <a:rect l="l" t="t" r="r" b="b"/>
             <a:pathLst>
-              <a:path w="1747894" h="699157">
+              <a:path w="2513479" h="1005392">
                 <a:moveTo>
-                  <a:pt x="0" y="699157"/>
+                  <a:pt x="0" y="1005392"/>
                 </a:moveTo>
                 <a:lnTo>
-                  <a:pt x="1747894" y="699157"/>
-                </a:lnTo>
-                <a:lnTo>
-                  <a:pt x="873947" y="0"/>
+                  <a:pt x="2513479" y="1005392"/>
+                </a:lnTo>
+                <a:lnTo>
+                  <a:pt x="1256740" y="0"/>
                 </a:lnTo>
                 <a:close/>
               </a:path>
@@ -10787,8 +10787,8 @@
         </p:nvSpPr>
         <p:spPr>
           <a:xfrm>
-            <a:off x="5948818" y="2458436"/>
-            <a:ext cx="262184" cy="320447"/>
+            <a:off x="5885019" y="2917788"/>
+            <a:ext cx="377022" cy="460805"/>
           </a:xfrm>
           <a:custGeom>
             <a:avLst/>
@@ -10797,15 +10797,15 @@
             <a:cxnLst/>
             <a:rect l="l" t="t" r="r" b="b"/>
             <a:pathLst>
-              <a:path w="262184" h="320447">
+              <a:path w="377022" h="460805">
                 <a:moveTo>
-                  <a:pt x="0" y="320447"/>
+                  <a:pt x="0" y="460805"/>
                 </a:moveTo>
                 <a:lnTo>
-                  <a:pt x="262184" y="320447"/>
-                </a:lnTo>
-                <a:lnTo>
-                  <a:pt x="262184" y="0"/>
+                  <a:pt x="377022" y="460805"/>
+                </a:lnTo>
+                <a:lnTo>
+                  <a:pt x="377022" y="0"/>
                 </a:lnTo>
                 <a:lnTo>
                   <a:pt x="0" y="0"/>
@@ -10833,8 +10833,8 @@
         </p:nvSpPr>
         <p:spPr>
           <a:xfrm flipV="1">
-            <a:off x="5453582" y="2866278"/>
-            <a:ext cx="0" cy="407842"/>
+            <a:off x="5172867" y="3504266"/>
+            <a:ext cx="0" cy="586479"/>
           </a:xfrm>
           <a:prstGeom prst="line">
             <a:avLst/>
@@ -10856,8 +10856,8 @@
         </p:nvSpPr>
         <p:spPr>
           <a:xfrm flipV="1">
-            <a:off x="5890555" y="2866278"/>
-            <a:ext cx="0" cy="407842"/>
+            <a:off x="5801237" y="3504266"/>
+            <a:ext cx="0" cy="586479"/>
           </a:xfrm>
           <a:prstGeom prst="line">
             <a:avLst/>
@@ -10879,8 +10879,8 @@
         </p:nvSpPr>
         <p:spPr>
           <a:xfrm flipV="1">
-            <a:off x="6298397" y="2866278"/>
-            <a:ext cx="0" cy="407842"/>
+            <a:off x="6387715" y="3504266"/>
+            <a:ext cx="0" cy="586479"/>
           </a:xfrm>
           <a:prstGeom prst="line">
             <a:avLst/>
@@ -10902,8 +10902,8 @@
         </p:nvSpPr>
         <p:spPr>
           <a:xfrm flipV="1">
-            <a:off x="6735370" y="2866278"/>
-            <a:ext cx="0" cy="407842"/>
+            <a:off x="7016085" y="3504266"/>
+            <a:ext cx="0" cy="586479"/>
           </a:xfrm>
           <a:prstGeom prst="line">
             <a:avLst/>
@@ -10925,8 +10925,8 @@
         </p:nvSpPr>
         <p:spPr>
           <a:xfrm flipH="1">
-            <a:off x="5351621" y="1438832"/>
-            <a:ext cx="72829" cy="145658"/>
+            <a:off x="5026247" y="1451591"/>
+            <a:ext cx="104728" cy="209457"/>
           </a:xfrm>
           <a:prstGeom prst="line">
             <a:avLst/>
@@ -10948,8 +10948,8 @@
         </p:nvSpPr>
         <p:spPr>
           <a:xfrm flipH="1">
-            <a:off x="5701200" y="1438832"/>
-            <a:ext cx="72829" cy="145658"/>
+            <a:off x="5528943" y="1451591"/>
+            <a:ext cx="104728" cy="209457"/>
           </a:xfrm>
           <a:prstGeom prst="line">
             <a:avLst/>
@@ -10971,8 +10971,8 @@
         </p:nvSpPr>
         <p:spPr>
           <a:xfrm flipH="1">
-            <a:off x="6050779" y="1438832"/>
-            <a:ext cx="72829" cy="145658"/>
+            <a:off x="6031639" y="1451591"/>
+            <a:ext cx="104728" cy="209457"/>
           </a:xfrm>
           <a:prstGeom prst="line">
             <a:avLst/>
@@ -10994,8 +10994,8 @@
         </p:nvSpPr>
         <p:spPr>
           <a:xfrm flipH="1">
-            <a:off x="6400357" y="1438832"/>
-            <a:ext cx="72829" cy="145658"/>
+            <a:off x="6534335" y="1451591"/>
+            <a:ext cx="104728" cy="209457"/>
           </a:xfrm>
           <a:prstGeom prst="line">
             <a:avLst/>
@@ -11017,8 +11017,8 @@
         </p:nvSpPr>
         <p:spPr>
           <a:xfrm flipH="1">
-            <a:off x="6749936" y="1438832"/>
-            <a:ext cx="72829" cy="145658"/>
+            <a:off x="7037031" y="1451591"/>
+            <a:ext cx="104728" cy="209457"/>
           </a:xfrm>
           <a:prstGeom prst="line">
             <a:avLst/>
@@ -11040,7 +11040,7 @@
         </p:nvSpPr>
         <p:spPr>
           <a:xfrm>
-            <a:off x="4352544" y="3547618"/>
+            <a:off x="4352544" y="4415282"/>
             <a:ext cx="3483864" cy="377190"/>
           </a:xfrm>
           <a:prstGeom prst="rect">
@@ -11079,8 +11079,8 @@
         </p:nvSpPr>
         <p:spPr>
           <a:xfrm>
-            <a:off x="8829298" y="3264872"/>
-            <a:ext cx="2138164" cy="125774"/>
+            <a:off x="8361035" y="4077446"/>
+            <a:ext cx="3074690" cy="180864"/>
           </a:xfrm>
           <a:custGeom>
             <a:avLst/>
@@ -11089,15 +11089,15 @@
             <a:cxnLst/>
             <a:rect l="l" t="t" r="r" b="b"/>
             <a:pathLst>
-              <a:path w="2138164" h="125774">
+              <a:path w="3074690" h="180864">
                 <a:moveTo>
-                  <a:pt x="0" y="125774"/>
+                  <a:pt x="0" y="180864"/>
                 </a:moveTo>
                 <a:lnTo>
-                  <a:pt x="2138164" y="125774"/>
-                </a:lnTo>
-                <a:lnTo>
-                  <a:pt x="2138164" y="0"/>
+                  <a:pt x="3074690" y="180864"/>
+                </a:lnTo>
+                <a:lnTo>
+                  <a:pt x="3074690" y="0"/>
                 </a:lnTo>
                 <a:lnTo>
                   <a:pt x="0" y="0"/>
@@ -11120,8 +11120,8 @@
         </p:nvSpPr>
         <p:spPr>
           <a:xfrm>
-            <a:off x="9080847" y="2384451"/>
-            <a:ext cx="1572179" cy="880420"/>
+            <a:off x="8722763" y="2811397"/>
+            <a:ext cx="2260802" cy="1266049"/>
           </a:xfrm>
           <a:custGeom>
             <a:avLst/>
@@ -11130,15 +11130,15 @@
             <a:cxnLst/>
             <a:rect l="l" t="t" r="r" b="b"/>
             <a:pathLst>
-              <a:path w="1572179" h="880420">
+              <a:path w="2260802" h="1266049">
                 <a:moveTo>
-                  <a:pt x="0" y="880420"/>
+                  <a:pt x="0" y="1266049"/>
                 </a:moveTo>
                 <a:lnTo>
-                  <a:pt x="1572179" y="880420"/>
-                </a:lnTo>
-                <a:lnTo>
-                  <a:pt x="1572179" y="0"/>
+                  <a:pt x="2260802" y="1266049"/>
+                </a:lnTo>
+                <a:lnTo>
+                  <a:pt x="2260802" y="0"/>
                 </a:lnTo>
                 <a:lnTo>
                   <a:pt x="0" y="0"/>
@@ -11166,8 +11166,8 @@
         </p:nvSpPr>
         <p:spPr>
           <a:xfrm>
-            <a:off x="10212816" y="1849910"/>
-            <a:ext cx="157218" cy="314436"/>
+            <a:off x="10350540" y="2042724"/>
+            <a:ext cx="226080" cy="452160"/>
           </a:xfrm>
           <a:custGeom>
             <a:avLst/>
@@ -11176,15 +11176,15 @@
             <a:cxnLst/>
             <a:rect l="l" t="t" r="r" b="b"/>
             <a:pathLst>
-              <a:path w="157218" h="314436">
+              <a:path w="226080" h="452160">
                 <a:moveTo>
-                  <a:pt x="0" y="314436"/>
+                  <a:pt x="0" y="452160"/>
                 </a:moveTo>
                 <a:lnTo>
-                  <a:pt x="157218" y="314436"/>
-                </a:lnTo>
-                <a:lnTo>
-                  <a:pt x="157218" y="0"/>
+                  <a:pt x="226080" y="452160"/>
+                </a:lnTo>
+                <a:lnTo>
+                  <a:pt x="226080" y="0"/>
                 </a:lnTo>
                 <a:lnTo>
                   <a:pt x="0" y="0"/>
@@ -11212,8 +11212,8 @@
         </p:nvSpPr>
         <p:spPr>
           <a:xfrm>
-            <a:off x="8955072" y="1755579"/>
-            <a:ext cx="1823728" cy="628872"/>
+            <a:off x="8541899" y="1907076"/>
+            <a:ext cx="2622530" cy="904321"/>
           </a:xfrm>
           <a:custGeom>
             <a:avLst/>
@@ -11222,15 +11222,15 @@
             <a:cxnLst/>
             <a:rect l="l" t="t" r="r" b="b"/>
             <a:pathLst>
-              <a:path w="1823728" h="628872">
+              <a:path w="2622530" h="904321">
                 <a:moveTo>
-                  <a:pt x="0" y="628872"/>
+                  <a:pt x="0" y="904321"/>
                 </a:moveTo>
                 <a:lnTo>
-                  <a:pt x="1823728" y="628872"/>
-                </a:lnTo>
-                <a:lnTo>
-                  <a:pt x="911864" y="0"/>
+                  <a:pt x="2622530" y="904321"/>
+                </a:lnTo>
+                <a:lnTo>
+                  <a:pt x="1311265" y="0"/>
                 </a:lnTo>
                 <a:close/>
               </a:path>
@@ -11255,8 +11255,8 @@
         </p:nvSpPr>
         <p:spPr>
           <a:xfrm>
-            <a:off x="8955072" y="1755579"/>
-            <a:ext cx="1823728" cy="628872"/>
+            <a:off x="8541899" y="1907076"/>
+            <a:ext cx="2622530" cy="904321"/>
           </a:xfrm>
           <a:custGeom>
             <a:avLst/>
@@ -11265,24 +11265,24 @@
             <a:cxnLst/>
             <a:rect l="l" t="t" r="r" b="b"/>
             <a:pathLst>
-              <a:path w="1823728" h="628872">
+              <a:path w="2622530" h="904321">
                 <a:moveTo>
-                  <a:pt x="0" y="628872"/>
+                  <a:pt x="0" y="904321"/>
                 </a:moveTo>
                 <a:lnTo>
-                  <a:pt x="911864" y="0"/>
-                </a:lnTo>
-                <a:lnTo>
-                  <a:pt x="1823728" y="628872"/>
-                </a:lnTo>
-                <a:lnTo>
-                  <a:pt x="1666510" y="628872"/>
-                </a:lnTo>
-                <a:lnTo>
-                  <a:pt x="911864" y="110053"/>
-                </a:lnTo>
-                <a:lnTo>
-                  <a:pt x="157218" y="628872"/>
+                  <a:pt x="1311265" y="0"/>
+                </a:lnTo>
+                <a:lnTo>
+                  <a:pt x="2622530" y="904321"/>
+                </a:lnTo>
+                <a:lnTo>
+                  <a:pt x="2396450" y="904321"/>
+                </a:lnTo>
+                <a:lnTo>
+                  <a:pt x="1311265" y="158256"/>
+                </a:lnTo>
+                <a:lnTo>
+                  <a:pt x="226080" y="904321"/>
                 </a:lnTo>
                 <a:close/>
               </a:path>
@@ -11307,8 +11307,8 @@
         </p:nvSpPr>
         <p:spPr>
           <a:xfrm>
-            <a:off x="9395283" y="2620278"/>
-            <a:ext cx="282992" cy="251549"/>
+            <a:off x="9174923" y="3150517"/>
+            <a:ext cx="406944" cy="361728"/>
           </a:xfrm>
           <a:custGeom>
             <a:avLst/>
@@ -11317,15 +11317,15 @@
             <a:cxnLst/>
             <a:rect l="l" t="t" r="r" b="b"/>
             <a:pathLst>
-              <a:path w="282992" h="251549">
+              <a:path w="406944" h="361728">
                 <a:moveTo>
-                  <a:pt x="0" y="251549"/>
+                  <a:pt x="0" y="361728"/>
                 </a:moveTo>
                 <a:lnTo>
-                  <a:pt x="282992" y="251549"/>
-                </a:lnTo>
-                <a:lnTo>
-                  <a:pt x="282992" y="0"/>
+                  <a:pt x="406944" y="361728"/>
+                </a:lnTo>
+                <a:lnTo>
+                  <a:pt x="406944" y="0"/>
                 </a:lnTo>
                 <a:lnTo>
                   <a:pt x="0" y="0"/>
@@ -11353,8 +11353,8 @@
         </p:nvSpPr>
         <p:spPr>
           <a:xfrm>
-            <a:off x="10024154" y="2730331"/>
-            <a:ext cx="282992" cy="534541"/>
+            <a:off x="10079244" y="3308773"/>
+            <a:ext cx="406944" cy="768673"/>
           </a:xfrm>
           <a:custGeom>
             <a:avLst/>
@@ -11363,15 +11363,15 @@
             <a:cxnLst/>
             <a:rect l="l" t="t" r="r" b="b"/>
             <a:pathLst>
-              <a:path w="282992" h="534541">
+              <a:path w="406944" h="768673">
                 <a:moveTo>
-                  <a:pt x="0" y="534541"/>
+                  <a:pt x="0" y="768673"/>
                 </a:moveTo>
                 <a:lnTo>
-                  <a:pt x="282992" y="534541"/>
-                </a:lnTo>
-                <a:lnTo>
-                  <a:pt x="282992" y="0"/>
+                  <a:pt x="406944" y="768673"/>
+                </a:lnTo>
+                <a:lnTo>
+                  <a:pt x="406944" y="0"/>
                 </a:lnTo>
                 <a:lnTo>
                   <a:pt x="0" y="0"/>
@@ -11399,8 +11399,8 @@
         </p:nvSpPr>
         <p:spPr>
           <a:xfrm>
-            <a:off x="8948784" y="1654960"/>
-            <a:ext cx="75465" cy="75465"/>
+            <a:off x="8532856" y="1762385"/>
+            <a:ext cx="108518" cy="108518"/>
           </a:xfrm>
           <a:prstGeom prst="ellipse">
             <a:avLst/>
@@ -11424,8 +11424,8 @@
         </p:nvSpPr>
         <p:spPr>
           <a:xfrm>
-            <a:off x="9294663" y="1466298"/>
-            <a:ext cx="75465" cy="75465"/>
+            <a:off x="9030232" y="1491089"/>
+            <a:ext cx="108518" cy="108518"/>
           </a:xfrm>
           <a:prstGeom prst="ellipse">
             <a:avLst/>
@@ -11449,8 +11449,8 @@
         </p:nvSpPr>
         <p:spPr>
           <a:xfrm>
-            <a:off x="10489519" y="1497742"/>
-            <a:ext cx="75465" cy="75465"/>
+            <a:off x="10748441" y="1536305"/>
+            <a:ext cx="108518" cy="108518"/>
           </a:xfrm>
           <a:prstGeom prst="ellipse">
             <a:avLst/>
@@ -11474,8 +11474,8 @@
         </p:nvSpPr>
         <p:spPr>
           <a:xfrm>
-            <a:off x="10803955" y="1780734"/>
-            <a:ext cx="75465" cy="75465"/>
+            <a:off x="11200602" y="1943249"/>
+            <a:ext cx="108518" cy="108518"/>
           </a:xfrm>
           <a:prstGeom prst="ellipse">
             <a:avLst/>
@@ -11499,8 +11499,8 @@
         </p:nvSpPr>
         <p:spPr>
           <a:xfrm>
-            <a:off x="10866842" y="2158057"/>
-            <a:ext cx="75465" cy="75465"/>
+            <a:off x="11291034" y="2485842"/>
+            <a:ext cx="108518" cy="108518"/>
           </a:xfrm>
           <a:prstGeom prst="ellipse">
             <a:avLst/>
@@ -11524,8 +11524,8 @@
         </p:nvSpPr>
         <p:spPr>
           <a:xfrm>
-            <a:off x="8854453" y="2032283"/>
-            <a:ext cx="75465" cy="75465"/>
+            <a:off x="8397208" y="2304977"/>
+            <a:ext cx="108518" cy="108518"/>
           </a:xfrm>
           <a:prstGeom prst="ellipse">
             <a:avLst/>
@@ -11549,8 +11549,8 @@
         </p:nvSpPr>
         <p:spPr>
           <a:xfrm>
-            <a:off x="9080847" y="3044767"/>
-            <a:ext cx="1572179" cy="0"/>
+            <a:off x="8722763" y="3760934"/>
+            <a:ext cx="2260802" cy="0"/>
           </a:xfrm>
           <a:prstGeom prst="line">
             <a:avLst/>
@@ -11572,8 +11572,8 @@
         </p:nvSpPr>
         <p:spPr>
           <a:xfrm>
-            <a:off x="9080847" y="2824661"/>
-            <a:ext cx="1572179" cy="0"/>
+            <a:off x="8722763" y="3444421"/>
+            <a:ext cx="2260802" cy="0"/>
           </a:xfrm>
           <a:prstGeom prst="line">
             <a:avLst/>
@@ -11595,8 +11595,8 @@
         </p:nvSpPr>
         <p:spPr>
           <a:xfrm>
-            <a:off x="9080847" y="2604556"/>
-            <a:ext cx="1572179" cy="0"/>
+            <a:off x="8722763" y="3127909"/>
+            <a:ext cx="2260802" cy="0"/>
           </a:xfrm>
           <a:prstGeom prst="line">
             <a:avLst/>
@@ -11618,7 +11618,7 @@
         </p:nvSpPr>
         <p:spPr>
           <a:xfrm>
-            <a:off x="8156448" y="3547618"/>
+            <a:off x="8156448" y="4415282"/>
             <a:ext cx="3483864" cy="377190"/>
           </a:xfrm>
           <a:prstGeom prst="rect">
@@ -11832,333 +11832,1018 @@
           </a:p>
         </p:txBody>
       </p:sp>
-      <p:sp>
-        <p:nvSpPr>
-          <p:cNvPr id="5" name="S06-card89"/>
-          <p:cNvSpPr/>
-          <p:nvPr/>
-        </p:nvSpPr>
-        <p:spPr>
-          <a:xfrm>
-            <a:off x="548640" y="2121916"/>
-            <a:ext cx="3544824" cy="2202688"/>
-          </a:xfrm>
-          <a:prstGeom prst="roundRect">
-            <a:avLst>
-              <a:gd name="adj" fmla="val 4982"/>
-            </a:avLst>
-          </a:prstGeom>
-          <a:solidFill>
-            <a:srgbClr val="EAF3F1"/>
-          </a:solidFill>
-          <a:ln w="12700">
-            <a:solidFill>
-              <a:srgbClr val="EAF3F1"/>
-            </a:solidFill>
-            <a:prstDash val="solid"/>
-          </a:ln>
-        </p:spPr>
-      </p:sp>
-      <p:sp>
-        <p:nvSpPr>
-          <p:cNvPr id="6" name="S06-cardtext90"/>
-          <p:cNvSpPr txBox="1"/>
-          <p:nvPr/>
-        </p:nvSpPr>
-        <p:spPr>
-          <a:xfrm>
-            <a:off x="822960" y="2259076"/>
-            <a:ext cx="2996184" cy="1928368"/>
-          </a:xfrm>
-          <a:prstGeom prst="rect">
-            <a:avLst/>
-          </a:prstGeom>
-          <a:noFill/>
-          <a:ln/>
-        </p:spPr>
-        <p:txBody>
-          <a:bodyPr wrap="square" lIns="0" tIns="0" rIns="0" bIns="0" rtlCol="0" anchor="ctr"/>
-          <a:lstStyle/>
-          <a:p>
-            <a:pPr eaLnBrk="0" indent="0" marL="0">
-              <a:spcAft>
-                <a:spcPts val="600"/>
-              </a:spcAft>
-              <a:buNone/>
-            </a:pPr>
-            <a:r>
-              <a:rPr lang="ko-KR" altLang="en-US" sz="2800" b="1" dirty="0">
-                <a:solidFill>
-                  <a:srgbClr val="1F2937"/>
-                </a:solidFill>
-                <a:latin typeface="맑은 고딕" pitchFamily="34" charset="0"/>
-                <a:ea typeface="맑은 고딕" pitchFamily="34" charset="-122"/>
-                <a:cs typeface="맑은 고딕" pitchFamily="34" charset="-120"/>
-              </a:rPr>
-              <a:t>덥고 건조한 곳</a:t>
-            </a:r>
-            <a:endParaRPr lang="ko-KR" sz="2800" dirty="0"/>
-          </a:p>
-          <a:p>
-            <a:pPr eaLnBrk="0" indent="0" marL="0">
-              <a:spcAft>
-                <a:spcPts val="600"/>
-              </a:spcAft>
-              <a:buNone/>
-            </a:pPr>
-            <a:r>
-              <a:rPr lang="ko-KR" altLang="en-US" sz="2200" dirty="0">
-                <a:solidFill>
-                  <a:srgbClr val="1F2937"/>
-                </a:solidFill>
-                <a:latin typeface="맑은 고딕" pitchFamily="34" charset="0"/>
-                <a:ea typeface="맑은 고딕" pitchFamily="34" charset="-122"/>
-                <a:cs typeface="맑은 고딕" pitchFamily="34" charset="-120"/>
-              </a:rPr>
-              <a:t>온몸을 덮는 헐렁한 옷으로</a:t>
-            </a:r>
-            <a:endParaRPr lang="ko-KR" sz="2800" dirty="0"/>
-          </a:p>
-          <a:p>
-            <a:pPr eaLnBrk="0" indent="0" marL="0">
-              <a:spcAft>
-                <a:spcPts val="600"/>
-              </a:spcAft>
-              <a:buNone/>
-            </a:pPr>
-            <a:r>
-              <a:rPr lang="ko-KR" altLang="en-US" sz="2200" dirty="0">
-                <a:solidFill>
-                  <a:srgbClr val="1F2937"/>
-                </a:solidFill>
-                <a:latin typeface="맑은 고딕" pitchFamily="34" charset="0"/>
-                <a:ea typeface="맑은 고딕" pitchFamily="34" charset="-122"/>
-                <a:cs typeface="맑은 고딕" pitchFamily="34" charset="-120"/>
-              </a:rPr>
-              <a:t>햇볕과 모래바람을 막아요.</a:t>
-            </a:r>
-            <a:endParaRPr lang="ko-KR" sz="2800" dirty="0"/>
-          </a:p>
-        </p:txBody>
-      </p:sp>
-      <p:sp>
-        <p:nvSpPr>
-          <p:cNvPr id="7" name="S06-card91"/>
-          <p:cNvSpPr/>
-          <p:nvPr/>
-        </p:nvSpPr>
-        <p:spPr>
-          <a:xfrm>
-            <a:off x="4322064" y="2121916"/>
-            <a:ext cx="3544824" cy="2202688"/>
-          </a:xfrm>
-          <a:prstGeom prst="roundRect">
-            <a:avLst>
-              <a:gd name="adj" fmla="val 4982"/>
-            </a:avLst>
-          </a:prstGeom>
-          <a:solidFill>
-            <a:srgbClr val="EAF3F1"/>
-          </a:solidFill>
-          <a:ln w="12700">
-            <a:solidFill>
-              <a:srgbClr val="EAF3F1"/>
-            </a:solidFill>
-            <a:prstDash val="solid"/>
-          </a:ln>
-        </p:spPr>
-      </p:sp>
-      <p:sp>
-        <p:nvSpPr>
-          <p:cNvPr id="8" name="S06-cardtext92"/>
-          <p:cNvSpPr txBox="1"/>
-          <p:nvPr/>
-        </p:nvSpPr>
-        <p:spPr>
-          <a:xfrm>
-            <a:off x="4596384" y="2259076"/>
-            <a:ext cx="2996184" cy="1928368"/>
-          </a:xfrm>
-          <a:prstGeom prst="rect">
-            <a:avLst/>
-          </a:prstGeom>
-          <a:noFill/>
-          <a:ln/>
-        </p:spPr>
-        <p:txBody>
-          <a:bodyPr wrap="square" lIns="0" tIns="0" rIns="0" bIns="0" rtlCol="0" anchor="ctr"/>
-          <a:lstStyle/>
-          <a:p>
-            <a:pPr eaLnBrk="0" indent="0" marL="0">
-              <a:spcAft>
-                <a:spcPts val="600"/>
-              </a:spcAft>
-              <a:buNone/>
-            </a:pPr>
-            <a:r>
-              <a:rPr lang="ko-KR" altLang="en-US" sz="2800" b="1" dirty="0">
-                <a:solidFill>
-                  <a:srgbClr val="1F2937"/>
-                </a:solidFill>
-                <a:latin typeface="맑은 고딕" pitchFamily="34" charset="0"/>
-                <a:ea typeface="맑은 고딕" pitchFamily="34" charset="-122"/>
-                <a:cs typeface="맑은 고딕" pitchFamily="34" charset="-120"/>
-              </a:rPr>
-              <a:t>덥고 비가 많은 곳</a:t>
-            </a:r>
-            <a:endParaRPr lang="ko-KR" sz="2800" dirty="0"/>
-          </a:p>
-          <a:p>
-            <a:pPr eaLnBrk="0" indent="0" marL="0">
-              <a:spcAft>
-                <a:spcPts val="600"/>
-              </a:spcAft>
-              <a:buNone/>
-            </a:pPr>
-            <a:r>
-              <a:rPr lang="ko-KR" altLang="en-US" sz="2200" dirty="0">
-                <a:solidFill>
-                  <a:srgbClr val="1F2937"/>
-                </a:solidFill>
-                <a:latin typeface="맑은 고딕" pitchFamily="34" charset="0"/>
-                <a:ea typeface="맑은 고딕" pitchFamily="34" charset="-122"/>
-                <a:cs typeface="맑은 고딕" pitchFamily="34" charset="-120"/>
-              </a:rPr>
-              <a:t>얇은 옷을 입고, 동남아시아의</a:t>
-            </a:r>
-            <a:endParaRPr lang="ko-KR" sz="2800" dirty="0"/>
-          </a:p>
-          <a:p>
-            <a:pPr eaLnBrk="0" indent="0" marL="0">
-              <a:spcAft>
-                <a:spcPts val="600"/>
-              </a:spcAft>
-              <a:buNone/>
-            </a:pPr>
-            <a:r>
-              <a:rPr lang="ko-KR" altLang="en-US" sz="2200" dirty="0">
-                <a:solidFill>
-                  <a:srgbClr val="1F2937"/>
-                </a:solidFill>
-                <a:latin typeface="맑은 고딕" pitchFamily="34" charset="0"/>
-                <a:ea typeface="맑은 고딕" pitchFamily="34" charset="-122"/>
-                <a:cs typeface="맑은 고딕" pitchFamily="34" charset="-120"/>
-              </a:rPr>
-              <a:t>많은 곳은 쌀 음식을 즐겨요.</a:t>
-            </a:r>
-            <a:endParaRPr lang="ko-KR" sz="2800" dirty="0"/>
-          </a:p>
-        </p:txBody>
-      </p:sp>
-      <p:sp>
-        <p:nvSpPr>
-          <p:cNvPr id="9" name="S06-card93"/>
-          <p:cNvSpPr/>
-          <p:nvPr/>
-        </p:nvSpPr>
-        <p:spPr>
-          <a:xfrm>
-            <a:off x="8095488" y="2121916"/>
-            <a:ext cx="3544824" cy="2202688"/>
-          </a:xfrm>
-          <a:prstGeom prst="roundRect">
-            <a:avLst>
-              <a:gd name="adj" fmla="val 4982"/>
-            </a:avLst>
-          </a:prstGeom>
-          <a:solidFill>
-            <a:srgbClr val="EAF3F1"/>
-          </a:solidFill>
-          <a:ln w="12700">
-            <a:solidFill>
-              <a:srgbClr val="EAF3F1"/>
-            </a:solidFill>
-            <a:prstDash val="solid"/>
-          </a:ln>
-        </p:spPr>
-      </p:sp>
-      <p:sp>
-        <p:nvSpPr>
-          <p:cNvPr id="10" name="S06-cardtext94"/>
-          <p:cNvSpPr txBox="1"/>
-          <p:nvPr/>
-        </p:nvSpPr>
-        <p:spPr>
-          <a:xfrm>
-            <a:off x="8369808" y="2259076"/>
-            <a:ext cx="2996184" cy="1928368"/>
-          </a:xfrm>
-          <a:prstGeom prst="rect">
-            <a:avLst/>
-          </a:prstGeom>
-          <a:noFill/>
-          <a:ln/>
-        </p:spPr>
-        <p:txBody>
-          <a:bodyPr wrap="square" lIns="0" tIns="0" rIns="0" bIns="0" rtlCol="0" anchor="ctr"/>
-          <a:lstStyle/>
-          <a:p>
-            <a:pPr eaLnBrk="0" indent="0" marL="0">
-              <a:spcAft>
-                <a:spcPts val="600"/>
-              </a:spcAft>
-              <a:buNone/>
-            </a:pPr>
-            <a:r>
-              <a:rPr lang="ko-KR" altLang="en-US" sz="2800" b="1" dirty="0">
-                <a:solidFill>
-                  <a:srgbClr val="1F2937"/>
-                </a:solidFill>
-                <a:latin typeface="맑은 고딕" pitchFamily="34" charset="0"/>
-                <a:ea typeface="맑은 고딕" pitchFamily="34" charset="-122"/>
-                <a:cs typeface="맑은 고딕" pitchFamily="34" charset="-120"/>
-              </a:rPr>
-              <a:t>추운 곳</a:t>
-            </a:r>
-            <a:endParaRPr lang="ko-KR" sz="2800" dirty="0"/>
-          </a:p>
-          <a:p>
-            <a:pPr eaLnBrk="0" indent="0" marL="0">
-              <a:spcAft>
-                <a:spcPts val="600"/>
-              </a:spcAft>
-              <a:buNone/>
-            </a:pPr>
-            <a:r>
-              <a:rPr lang="ko-KR" altLang="en-US" sz="2200" dirty="0">
-                <a:solidFill>
-                  <a:srgbClr val="1F2937"/>
-                </a:solidFill>
-                <a:latin typeface="맑은 고딕" pitchFamily="34" charset="0"/>
-                <a:ea typeface="맑은 고딕" pitchFamily="34" charset="-122"/>
-                <a:cs typeface="맑은 고딕" pitchFamily="34" charset="-120"/>
-              </a:rPr>
-              <a:t>북극 가까운 곳에서는 옛날부터</a:t>
-            </a:r>
-            <a:endParaRPr lang="ko-KR" sz="2800" dirty="0"/>
-          </a:p>
-          <a:p>
-            <a:pPr eaLnBrk="0" indent="0" marL="0">
-              <a:spcAft>
-                <a:spcPts val="600"/>
-              </a:spcAft>
-              <a:buNone/>
-            </a:pPr>
-            <a:r>
-              <a:rPr lang="ko-KR" altLang="en-US" sz="2200" dirty="0">
-                <a:solidFill>
-                  <a:srgbClr val="1F2937"/>
-                </a:solidFill>
-                <a:latin typeface="맑은 고딕" pitchFamily="34" charset="0"/>
-                <a:ea typeface="맑은 고딕" pitchFamily="34" charset="-122"/>
-                <a:cs typeface="맑은 고딕" pitchFamily="34" charset="-120"/>
-              </a:rPr>
-              <a:t>털가죽 옷을 입고 고기·생선을 먹었어요.</a:t>
-            </a:r>
-            <a:endParaRPr lang="ko-KR" sz="2800" dirty="0"/>
-          </a:p>
-        </p:txBody>
-      </p:sp>
+      <p:graphicFrame>
+        <p:nvGraphicFramePr>
+          <p:cNvPr id="7" name="S06-table89"/>
+          <p:cNvGraphicFramePr>
+            <a:graphicFrameLocks noGrp="1"/>
+          </p:cNvGraphicFramePr>
+          <p:nvPr>
+            <p:extLst>
+              <p:ext uri="{D42A27DB-BD31-4B8C-83A1-F6EECF244321}">
+                <p14:modId xmlns:p14="http://schemas.microsoft.com/office/powerpoint/2010/main" val="1579011935"/>
+              </p:ext>
+            </p:extLst>
+          </p:nvPr>
+        </p:nvGraphicFramePr>
+        <p:xfrm>
+          <a:off x="608076" y="1702308"/>
+          <a:ext cx="10972800" cy="914400"/>
+        </p:xfrm>
+        <a:graphic>
+          <a:graphicData uri="http://schemas.openxmlformats.org/drawingml/2006/table">
+            <a:tbl>
+              <a:tblPr/>
+              <a:tblGrid>
+                <a:gridCol w="2852928"/>
+                <a:gridCol w="4059936"/>
+                <a:gridCol w="4059936"/>
+              </a:tblGrid>
+              <a:tr h="481584">
+                <a:tc>
+                  <a:txBody>
+                    <a:bodyPr/>
+                    <a:lstStyle/>
+                    <a:p>
+                      <a:pPr eaLnBrk="0" algn="ctr" indent="0" marL="0">
+                        <a:buNone/>
+                      </a:pPr>
+                      <a:endParaRPr lang="en-US" sz="2400" dirty="0">
+                        <a:latin typeface="맑은 고딕" charset="0"/>
+                        <a:ea typeface="맑은 고딕" charset="0"/>
+                        <a:cs typeface="맑은 고딕" charset="0"/>
+                      </a:endParaRPr>
+                    </a:p>
+                  </a:txBody>
+                  <a:tcPr marL="38100" marR="38100" marT="38100" marB="38100" anchor="ctr">
+                    <a:lnL w="12700" cap="flat" cmpd="sng" algn="ctr">
+                      <a:solidFill>
+                        <a:srgbClr val="94A3B8"/>
+                      </a:solidFill>
+                      <a:prstDash val="solid"/>
+                      <a:round/>
+                      <a:headEnd type="none" w="med" len="med"/>
+                      <a:tailEnd type="none" w="med" len="med"/>
+                    </a:lnL>
+                    <a:lnR w="12700" cap="flat" cmpd="sng" algn="ctr">
+                      <a:solidFill>
+                        <a:srgbClr val="94A3B8"/>
+                      </a:solidFill>
+                      <a:prstDash val="solid"/>
+                      <a:round/>
+                      <a:headEnd type="none" w="med" len="med"/>
+                      <a:tailEnd type="none" w="med" len="med"/>
+                    </a:lnR>
+                    <a:lnT w="12700" cap="flat" cmpd="sng" algn="ctr">
+                      <a:solidFill>
+                        <a:srgbClr val="94A3B8"/>
+                      </a:solidFill>
+                      <a:prstDash val="solid"/>
+                      <a:round/>
+                      <a:headEnd type="none" w="med" len="med"/>
+                      <a:tailEnd type="none" w="med" len="med"/>
+                    </a:lnT>
+                    <a:lnB w="12700" cap="flat" cmpd="sng" algn="ctr">
+                      <a:solidFill>
+                        <a:srgbClr val="94A3B8"/>
+                      </a:solidFill>
+                      <a:prstDash val="solid"/>
+                      <a:round/>
+                      <a:headEnd type="none" w="med" len="med"/>
+                      <a:tailEnd type="none" w="med" len="med"/>
+                    </a:lnB>
+                    <a:solidFill>
+                      <a:srgbClr val="EAF3F1"/>
+                    </a:solidFill>
+                  </a:tcPr>
+                </a:tc>
+                <a:tc>
+                  <a:txBody>
+                    <a:bodyPr/>
+                    <a:lstStyle/>
+                    <a:p>
+                      <a:pPr eaLnBrk="0" algn="ctr" indent="0" marL="0">
+                        <a:buNone/>
+                      </a:pPr>
+                      <a:r>
+                        <a:rPr lang="en-US" sz="2400" b="1" dirty="0">
+                          <a:solidFill>
+                            <a:srgbClr val="1F2937"/>
+                          </a:solidFill>
+                          <a:latin typeface="맑은 고딕" pitchFamily="34" charset="0"/>
+                          <a:ea typeface="맑은 고딕" pitchFamily="34" charset="-122"/>
+                          <a:cs typeface="맑은 고딕" pitchFamily="34" charset="-120"/>
+                        </a:rPr>
+                        <a:t>옷</a:t>
+                      </a:r>
+                      <a:endParaRPr lang="en-US" sz="2400" dirty="0">
+                        <a:latin typeface="맑은 고딕" charset="0"/>
+                        <a:ea typeface="맑은 고딕" charset="0"/>
+                        <a:cs typeface="맑은 고딕" charset="0"/>
+                      </a:endParaRPr>
+                    </a:p>
+                  </a:txBody>
+                  <a:tcPr marL="38100" marR="38100" marT="38100" marB="38100" anchor="ctr">
+                    <a:lnL w="12700" cap="flat" cmpd="sng" algn="ctr">
+                      <a:solidFill>
+                        <a:srgbClr val="94A3B8"/>
+                      </a:solidFill>
+                      <a:prstDash val="solid"/>
+                      <a:round/>
+                      <a:headEnd type="none" w="med" len="med"/>
+                      <a:tailEnd type="none" w="med" len="med"/>
+                    </a:lnL>
+                    <a:lnR w="12700" cap="flat" cmpd="sng" algn="ctr">
+                      <a:solidFill>
+                        <a:srgbClr val="94A3B8"/>
+                      </a:solidFill>
+                      <a:prstDash val="solid"/>
+                      <a:round/>
+                      <a:headEnd type="none" w="med" len="med"/>
+                      <a:tailEnd type="none" w="med" len="med"/>
+                    </a:lnR>
+                    <a:lnT w="12700" cap="flat" cmpd="sng" algn="ctr">
+                      <a:solidFill>
+                        <a:srgbClr val="94A3B8"/>
+                      </a:solidFill>
+                      <a:prstDash val="solid"/>
+                      <a:round/>
+                      <a:headEnd type="none" w="med" len="med"/>
+                      <a:tailEnd type="none" w="med" len="med"/>
+                    </a:lnT>
+                    <a:lnB w="12700" cap="flat" cmpd="sng" algn="ctr">
+                      <a:solidFill>
+                        <a:srgbClr val="94A3B8"/>
+                      </a:solidFill>
+                      <a:prstDash val="solid"/>
+                      <a:round/>
+                      <a:headEnd type="none" w="med" len="med"/>
+                      <a:tailEnd type="none" w="med" len="med"/>
+                    </a:lnB>
+                    <a:solidFill>
+                      <a:srgbClr val="EAF3F1"/>
+                    </a:solidFill>
+                  </a:tcPr>
+                </a:tc>
+                <a:tc>
+                  <a:txBody>
+                    <a:bodyPr/>
+                    <a:lstStyle/>
+                    <a:p>
+                      <a:pPr eaLnBrk="0" algn="ctr" indent="0" marL="0">
+                        <a:buNone/>
+                      </a:pPr>
+                      <a:r>
+                        <a:rPr lang="en-US" sz="2400" b="1" dirty="0">
+                          <a:solidFill>
+                            <a:srgbClr val="1F2937"/>
+                          </a:solidFill>
+                          <a:latin typeface="맑은 고딕" pitchFamily="34" charset="0"/>
+                          <a:ea typeface="맑은 고딕" pitchFamily="34" charset="-122"/>
+                          <a:cs typeface="맑은 고딕" pitchFamily="34" charset="-120"/>
+                        </a:rPr>
+                        <a:t>먹을거리</a:t>
+                      </a:r>
+                      <a:endParaRPr lang="en-US" sz="2400" dirty="0">
+                        <a:latin typeface="맑은 고딕" charset="0"/>
+                        <a:ea typeface="맑은 고딕" charset="0"/>
+                        <a:cs typeface="맑은 고딕" charset="0"/>
+                      </a:endParaRPr>
+                    </a:p>
+                  </a:txBody>
+                  <a:tcPr marL="38100" marR="38100" marT="38100" marB="38100" anchor="ctr">
+                    <a:lnL w="12700" cap="flat" cmpd="sng" algn="ctr">
+                      <a:solidFill>
+                        <a:srgbClr val="94A3B8"/>
+                      </a:solidFill>
+                      <a:prstDash val="solid"/>
+                      <a:round/>
+                      <a:headEnd type="none" w="med" len="med"/>
+                      <a:tailEnd type="none" w="med" len="med"/>
+                    </a:lnL>
+                    <a:lnR w="12700" cap="flat" cmpd="sng" algn="ctr">
+                      <a:solidFill>
+                        <a:srgbClr val="94A3B8"/>
+                      </a:solidFill>
+                      <a:prstDash val="solid"/>
+                      <a:round/>
+                      <a:headEnd type="none" w="med" len="med"/>
+                      <a:tailEnd type="none" w="med" len="med"/>
+                    </a:lnR>
+                    <a:lnT w="12700" cap="flat" cmpd="sng" algn="ctr">
+                      <a:solidFill>
+                        <a:srgbClr val="94A3B8"/>
+                      </a:solidFill>
+                      <a:prstDash val="solid"/>
+                      <a:round/>
+                      <a:headEnd type="none" w="med" len="med"/>
+                      <a:tailEnd type="none" w="med" len="med"/>
+                    </a:lnT>
+                    <a:lnB w="12700" cap="flat" cmpd="sng" algn="ctr">
+                      <a:solidFill>
+                        <a:srgbClr val="94A3B8"/>
+                      </a:solidFill>
+                      <a:prstDash val="solid"/>
+                      <a:round/>
+                      <a:headEnd type="none" w="med" len="med"/>
+                      <a:tailEnd type="none" w="med" len="med"/>
+                    </a:lnB>
+                    <a:solidFill>
+                      <a:srgbClr val="EAF3F1"/>
+                    </a:solidFill>
+                  </a:tcPr>
+                </a:tc>
+              </a:tr>
+              <a:tr h="853440">
+                <a:tc>
+                  <a:txBody>
+                    <a:bodyPr/>
+                    <a:lstStyle/>
+                    <a:p>
+                      <a:pPr eaLnBrk="0" algn="ctr" indent="0" marL="0">
+                        <a:buNone/>
+                      </a:pPr>
+                      <a:r>
+                        <a:rPr lang="en-US" sz="2400" dirty="0">
+                          <a:solidFill>
+                            <a:srgbClr val="1F2937"/>
+                          </a:solidFill>
+                          <a:latin typeface="맑은 고딕" pitchFamily="34" charset="0"/>
+                          <a:ea typeface="맑은 고딕" pitchFamily="34" charset="-122"/>
+                          <a:cs typeface="맑은 고딕" pitchFamily="34" charset="-120"/>
+                        </a:rPr>
+                        <a:t>덥고 건조한 곳</a:t>
+                      </a:r>
+                      <a:endParaRPr lang="en-US" sz="2400" dirty="0">
+                        <a:latin typeface="맑은 고딕" charset="0"/>
+                        <a:ea typeface="맑은 고딕" charset="0"/>
+                        <a:cs typeface="맑은 고딕" charset="0"/>
+                      </a:endParaRPr>
+                    </a:p>
+                  </a:txBody>
+                  <a:tcPr marL="38100" marR="38100" marT="38100" marB="38100" anchor="ctr">
+                    <a:lnL w="12700" cap="flat" cmpd="sng" algn="ctr">
+                      <a:solidFill>
+                        <a:srgbClr val="94A3B8"/>
+                      </a:solidFill>
+                      <a:prstDash val="solid"/>
+                      <a:round/>
+                      <a:headEnd type="none" w="med" len="med"/>
+                      <a:tailEnd type="none" w="med" len="med"/>
+                    </a:lnL>
+                    <a:lnR w="12700" cap="flat" cmpd="sng" algn="ctr">
+                      <a:solidFill>
+                        <a:srgbClr val="94A3B8"/>
+                      </a:solidFill>
+                      <a:prstDash val="solid"/>
+                      <a:round/>
+                      <a:headEnd type="none" w="med" len="med"/>
+                      <a:tailEnd type="none" w="med" len="med"/>
+                    </a:lnR>
+                    <a:lnT w="12700" cap="flat" cmpd="sng" algn="ctr">
+                      <a:solidFill>
+                        <a:srgbClr val="94A3B8"/>
+                      </a:solidFill>
+                      <a:prstDash val="solid"/>
+                      <a:round/>
+                      <a:headEnd type="none" w="med" len="med"/>
+                      <a:tailEnd type="none" w="med" len="med"/>
+                    </a:lnT>
+                    <a:lnB w="12700" cap="flat" cmpd="sng" algn="ctr">
+                      <a:solidFill>
+                        <a:srgbClr val="94A3B8"/>
+                      </a:solidFill>
+                      <a:prstDash val="solid"/>
+                      <a:round/>
+                      <a:headEnd type="none" w="med" len="med"/>
+                      <a:tailEnd type="none" w="med" len="med"/>
+                    </a:lnB>
+                    <a:solidFill>
+                      <a:srgbClr val="FFFFFF"/>
+                    </a:solidFill>
+                  </a:tcPr>
+                </a:tc>
+                <a:tc>
+                  <a:txBody>
+                    <a:bodyPr/>
+                    <a:lstStyle/>
+                    <a:p>
+                      <a:pPr eaLnBrk="0" algn="ctr" indent="0" marL="0">
+                        <a:buNone/>
+                      </a:pPr>
+                      <a:r>
+                        <a:rPr lang="en-US" sz="2400" dirty="0">
+                          <a:solidFill>
+                            <a:srgbClr val="1F2937"/>
+                          </a:solidFill>
+                          <a:latin typeface="맑은 고딕" pitchFamily="34" charset="0"/>
+                          <a:ea typeface="맑은 고딕" pitchFamily="34" charset="-122"/>
+                          <a:cs typeface="맑은 고딕" pitchFamily="34" charset="-120"/>
+                        </a:rPr>
+                        <a:t>온몸을 덮는 헐렁한 옷</a:t>
+                      </a:r>
+                      <a:endParaRPr lang="en-US" sz="2400" dirty="0">
+                        <a:latin typeface="맑은 고딕" charset="0"/>
+                        <a:ea typeface="맑은 고딕" charset="0"/>
+                        <a:cs typeface="맑은 고딕" charset="0"/>
+                      </a:endParaRPr>
+                    </a:p>
+                    <a:p>
+                      <a:pPr eaLnBrk="0" algn="ctr" indent="0" marL="0">
+                        <a:buNone/>
+                      </a:pPr>
+                      <a:r>
+                        <a:rPr lang="en-US" sz="2400" dirty="0">
+                          <a:solidFill>
+                            <a:srgbClr val="1F2937"/>
+                          </a:solidFill>
+                          <a:latin typeface="맑은 고딕" pitchFamily="34" charset="0"/>
+                          <a:ea typeface="맑은 고딕" pitchFamily="34" charset="-122"/>
+                          <a:cs typeface="맑은 고딕" pitchFamily="34" charset="-120"/>
+                        </a:rPr>
+                        <a:t>(햇볕·모래바람을 막아요)</a:t>
+                      </a:r>
+                      <a:endParaRPr lang="en-US" sz="2400" dirty="0">
+                        <a:latin typeface="맑은 고딕" charset="0"/>
+                        <a:ea typeface="맑은 고딕" charset="0"/>
+                        <a:cs typeface="맑은 고딕" charset="0"/>
+                      </a:endParaRPr>
+                    </a:p>
+                  </a:txBody>
+                  <a:tcPr marL="38100" marR="38100" marT="38100" marB="38100" anchor="ctr">
+                    <a:lnL w="12700" cap="flat" cmpd="sng" algn="ctr">
+                      <a:solidFill>
+                        <a:srgbClr val="94A3B8"/>
+                      </a:solidFill>
+                      <a:prstDash val="solid"/>
+                      <a:round/>
+                      <a:headEnd type="none" w="med" len="med"/>
+                      <a:tailEnd type="none" w="med" len="med"/>
+                    </a:lnL>
+                    <a:lnR w="12700" cap="flat" cmpd="sng" algn="ctr">
+                      <a:solidFill>
+                        <a:srgbClr val="94A3B8"/>
+                      </a:solidFill>
+                      <a:prstDash val="solid"/>
+                      <a:round/>
+                      <a:headEnd type="none" w="med" len="med"/>
+                      <a:tailEnd type="none" w="med" len="med"/>
+                    </a:lnR>
+                    <a:lnT w="12700" cap="flat" cmpd="sng" algn="ctr">
+                      <a:solidFill>
+                        <a:srgbClr val="94A3B8"/>
+                      </a:solidFill>
+                      <a:prstDash val="solid"/>
+                      <a:round/>
+                      <a:headEnd type="none" w="med" len="med"/>
+                      <a:tailEnd type="none" w="med" len="med"/>
+                    </a:lnT>
+                    <a:lnB w="12700" cap="flat" cmpd="sng" algn="ctr">
+                      <a:solidFill>
+                        <a:srgbClr val="94A3B8"/>
+                      </a:solidFill>
+                      <a:prstDash val="solid"/>
+                      <a:round/>
+                      <a:headEnd type="none" w="med" len="med"/>
+                      <a:tailEnd type="none" w="med" len="med"/>
+                    </a:lnB>
+                    <a:solidFill>
+                      <a:srgbClr val="FFFFFF"/>
+                    </a:solidFill>
+                  </a:tcPr>
+                </a:tc>
+                <a:tc>
+                  <a:txBody>
+                    <a:bodyPr/>
+                    <a:lstStyle/>
+                    <a:p>
+                      <a:pPr eaLnBrk="0" algn="ctr" indent="0" marL="0">
+                        <a:buNone/>
+                      </a:pPr>
+                      <a:r>
+                        <a:rPr lang="en-US" sz="2400" dirty="0">
+                          <a:solidFill>
+                            <a:srgbClr val="1F2937"/>
+                          </a:solidFill>
+                          <a:latin typeface="맑은 고딕" pitchFamily="34" charset="0"/>
+                          <a:ea typeface="맑은 고딕" pitchFamily="34" charset="-122"/>
+                          <a:cs typeface="맑은 고딕" pitchFamily="34" charset="-120"/>
+                        </a:rPr>
+                        <a:t>오아시스의 대추야자,</a:t>
+                      </a:r>
+                      <a:endParaRPr lang="en-US" sz="2400" dirty="0">
+                        <a:latin typeface="맑은 고딕" charset="0"/>
+                        <a:ea typeface="맑은 고딕" charset="0"/>
+                        <a:cs typeface="맑은 고딕" charset="0"/>
+                      </a:endParaRPr>
+                    </a:p>
+                    <a:p>
+                      <a:pPr eaLnBrk="0" algn="ctr" indent="0" marL="0">
+                        <a:buNone/>
+                      </a:pPr>
+                      <a:r>
+                        <a:rPr lang="en-US" sz="2400" dirty="0">
+                          <a:solidFill>
+                            <a:srgbClr val="1F2937"/>
+                          </a:solidFill>
+                          <a:latin typeface="맑은 고딕" pitchFamily="34" charset="0"/>
+                          <a:ea typeface="맑은 고딕" pitchFamily="34" charset="-122"/>
+                          <a:cs typeface="맑은 고딕" pitchFamily="34" charset="-120"/>
+                        </a:rPr>
+                        <a:t>기르는 가축의 젖과 고기</a:t>
+                      </a:r>
+                      <a:endParaRPr lang="en-US" sz="2400" dirty="0">
+                        <a:latin typeface="맑은 고딕" charset="0"/>
+                        <a:ea typeface="맑은 고딕" charset="0"/>
+                        <a:cs typeface="맑은 고딕" charset="0"/>
+                      </a:endParaRPr>
+                    </a:p>
+                  </a:txBody>
+                  <a:tcPr marL="38100" marR="38100" marT="38100" marB="38100" anchor="ctr">
+                    <a:lnL w="12700" cap="flat" cmpd="sng" algn="ctr">
+                      <a:solidFill>
+                        <a:srgbClr val="94A3B8"/>
+                      </a:solidFill>
+                      <a:prstDash val="solid"/>
+                      <a:round/>
+                      <a:headEnd type="none" w="med" len="med"/>
+                      <a:tailEnd type="none" w="med" len="med"/>
+                    </a:lnL>
+                    <a:lnR w="12700" cap="flat" cmpd="sng" algn="ctr">
+                      <a:solidFill>
+                        <a:srgbClr val="94A3B8"/>
+                      </a:solidFill>
+                      <a:prstDash val="solid"/>
+                      <a:round/>
+                      <a:headEnd type="none" w="med" len="med"/>
+                      <a:tailEnd type="none" w="med" len="med"/>
+                    </a:lnR>
+                    <a:lnT w="12700" cap="flat" cmpd="sng" algn="ctr">
+                      <a:solidFill>
+                        <a:srgbClr val="94A3B8"/>
+                      </a:solidFill>
+                      <a:prstDash val="solid"/>
+                      <a:round/>
+                      <a:headEnd type="none" w="med" len="med"/>
+                      <a:tailEnd type="none" w="med" len="med"/>
+                    </a:lnT>
+                    <a:lnB w="12700" cap="flat" cmpd="sng" algn="ctr">
+                      <a:solidFill>
+                        <a:srgbClr val="94A3B8"/>
+                      </a:solidFill>
+                      <a:prstDash val="solid"/>
+                      <a:round/>
+                      <a:headEnd type="none" w="med" len="med"/>
+                      <a:tailEnd type="none" w="med" len="med"/>
+                    </a:lnB>
+                    <a:solidFill>
+                      <a:srgbClr val="FFFFFF"/>
+                    </a:solidFill>
+                  </a:tcPr>
+                </a:tc>
+              </a:tr>
+              <a:tr h="853440">
+                <a:tc>
+                  <a:txBody>
+                    <a:bodyPr/>
+                    <a:lstStyle/>
+                    <a:p>
+                      <a:pPr eaLnBrk="0" algn="ctr" indent="0" marL="0">
+                        <a:buNone/>
+                      </a:pPr>
+                      <a:r>
+                        <a:rPr lang="en-US" sz="2400" dirty="0">
+                          <a:solidFill>
+                            <a:srgbClr val="1F2937"/>
+                          </a:solidFill>
+                          <a:latin typeface="맑은 고딕" pitchFamily="34" charset="0"/>
+                          <a:ea typeface="맑은 고딕" pitchFamily="34" charset="-122"/>
+                          <a:cs typeface="맑은 고딕" pitchFamily="34" charset="-120"/>
+                        </a:rPr>
+                        <a:t>덥고 비가 많은 곳</a:t>
+                      </a:r>
+                      <a:endParaRPr lang="en-US" sz="2400" dirty="0">
+                        <a:latin typeface="맑은 고딕" charset="0"/>
+                        <a:ea typeface="맑은 고딕" charset="0"/>
+                        <a:cs typeface="맑은 고딕" charset="0"/>
+                      </a:endParaRPr>
+                    </a:p>
+                    <a:p>
+                      <a:pPr eaLnBrk="0" algn="ctr" indent="0" marL="0">
+                        <a:buNone/>
+                      </a:pPr>
+                      <a:r>
+                        <a:rPr lang="en-US" sz="2400" dirty="0">
+                          <a:solidFill>
+                            <a:srgbClr val="1F2937"/>
+                          </a:solidFill>
+                          <a:latin typeface="맑은 고딕" pitchFamily="34" charset="0"/>
+                          <a:ea typeface="맑은 고딕" pitchFamily="34" charset="-122"/>
+                          <a:cs typeface="맑은 고딕" pitchFamily="34" charset="-120"/>
+                        </a:rPr>
+                        <a:t>(동남아시아)</a:t>
+                      </a:r>
+                      <a:endParaRPr lang="en-US" sz="2400" dirty="0">
+                        <a:latin typeface="맑은 고딕" charset="0"/>
+                        <a:ea typeface="맑은 고딕" charset="0"/>
+                        <a:cs typeface="맑은 고딕" charset="0"/>
+                      </a:endParaRPr>
+                    </a:p>
+                  </a:txBody>
+                  <a:tcPr marL="38100" marR="38100" marT="38100" marB="38100" anchor="ctr">
+                    <a:lnL w="12700" cap="flat" cmpd="sng" algn="ctr">
+                      <a:solidFill>
+                        <a:srgbClr val="94A3B8"/>
+                      </a:solidFill>
+                      <a:prstDash val="solid"/>
+                      <a:round/>
+                      <a:headEnd type="none" w="med" len="med"/>
+                      <a:tailEnd type="none" w="med" len="med"/>
+                    </a:lnL>
+                    <a:lnR w="12700" cap="flat" cmpd="sng" algn="ctr">
+                      <a:solidFill>
+                        <a:srgbClr val="94A3B8"/>
+                      </a:solidFill>
+                      <a:prstDash val="solid"/>
+                      <a:round/>
+                      <a:headEnd type="none" w="med" len="med"/>
+                      <a:tailEnd type="none" w="med" len="med"/>
+                    </a:lnR>
+                    <a:lnT w="12700" cap="flat" cmpd="sng" algn="ctr">
+                      <a:solidFill>
+                        <a:srgbClr val="94A3B8"/>
+                      </a:solidFill>
+                      <a:prstDash val="solid"/>
+                      <a:round/>
+                      <a:headEnd type="none" w="med" len="med"/>
+                      <a:tailEnd type="none" w="med" len="med"/>
+                    </a:lnT>
+                    <a:lnB w="12700" cap="flat" cmpd="sng" algn="ctr">
+                      <a:solidFill>
+                        <a:srgbClr val="94A3B8"/>
+                      </a:solidFill>
+                      <a:prstDash val="solid"/>
+                      <a:round/>
+                      <a:headEnd type="none" w="med" len="med"/>
+                      <a:tailEnd type="none" w="med" len="med"/>
+                    </a:lnB>
+                    <a:solidFill>
+                      <a:srgbClr val="FFFFFF"/>
+                    </a:solidFill>
+                  </a:tcPr>
+                </a:tc>
+                <a:tc>
+                  <a:txBody>
+                    <a:bodyPr/>
+                    <a:lstStyle/>
+                    <a:p>
+                      <a:pPr eaLnBrk="0" algn="ctr" indent="0" marL="0">
+                        <a:buNone/>
+                      </a:pPr>
+                      <a:r>
+                        <a:rPr lang="en-US" sz="2400" dirty="0">
+                          <a:solidFill>
+                            <a:srgbClr val="1F2937"/>
+                          </a:solidFill>
+                          <a:latin typeface="맑은 고딕" pitchFamily="34" charset="0"/>
+                          <a:ea typeface="맑은 고딕" pitchFamily="34" charset="-122"/>
+                          <a:cs typeface="맑은 고딕" pitchFamily="34" charset="-120"/>
+                        </a:rPr>
+                        <a:t>얇고 바람이</a:t>
+                      </a:r>
+                      <a:endParaRPr lang="en-US" sz="2400" dirty="0">
+                        <a:latin typeface="맑은 고딕" charset="0"/>
+                        <a:ea typeface="맑은 고딕" charset="0"/>
+                        <a:cs typeface="맑은 고딕" charset="0"/>
+                      </a:endParaRPr>
+                    </a:p>
+                    <a:p>
+                      <a:pPr eaLnBrk="0" algn="ctr" indent="0" marL="0">
+                        <a:buNone/>
+                      </a:pPr>
+                      <a:r>
+                        <a:rPr lang="en-US" sz="2400" dirty="0">
+                          <a:solidFill>
+                            <a:srgbClr val="1F2937"/>
+                          </a:solidFill>
+                          <a:latin typeface="맑은 고딕" pitchFamily="34" charset="0"/>
+                          <a:ea typeface="맑은 고딕" pitchFamily="34" charset="-122"/>
+                          <a:cs typeface="맑은 고딕" pitchFamily="34" charset="-120"/>
+                        </a:rPr>
+                        <a:t>잘 통하는 옷</a:t>
+                      </a:r>
+                      <a:endParaRPr lang="en-US" sz="2400" dirty="0">
+                        <a:latin typeface="맑은 고딕" charset="0"/>
+                        <a:ea typeface="맑은 고딕" charset="0"/>
+                        <a:cs typeface="맑은 고딕" charset="0"/>
+                      </a:endParaRPr>
+                    </a:p>
+                  </a:txBody>
+                  <a:tcPr marL="38100" marR="38100" marT="38100" marB="38100" anchor="ctr">
+                    <a:lnL w="12700" cap="flat" cmpd="sng" algn="ctr">
+                      <a:solidFill>
+                        <a:srgbClr val="94A3B8"/>
+                      </a:solidFill>
+                      <a:prstDash val="solid"/>
+                      <a:round/>
+                      <a:headEnd type="none" w="med" len="med"/>
+                      <a:tailEnd type="none" w="med" len="med"/>
+                    </a:lnL>
+                    <a:lnR w="12700" cap="flat" cmpd="sng" algn="ctr">
+                      <a:solidFill>
+                        <a:srgbClr val="94A3B8"/>
+                      </a:solidFill>
+                      <a:prstDash val="solid"/>
+                      <a:round/>
+                      <a:headEnd type="none" w="med" len="med"/>
+                      <a:tailEnd type="none" w="med" len="med"/>
+                    </a:lnR>
+                    <a:lnT w="12700" cap="flat" cmpd="sng" algn="ctr">
+                      <a:solidFill>
+                        <a:srgbClr val="94A3B8"/>
+                      </a:solidFill>
+                      <a:prstDash val="solid"/>
+                      <a:round/>
+                      <a:headEnd type="none" w="med" len="med"/>
+                      <a:tailEnd type="none" w="med" len="med"/>
+                    </a:lnT>
+                    <a:lnB w="12700" cap="flat" cmpd="sng" algn="ctr">
+                      <a:solidFill>
+                        <a:srgbClr val="94A3B8"/>
+                      </a:solidFill>
+                      <a:prstDash val="solid"/>
+                      <a:round/>
+                      <a:headEnd type="none" w="med" len="med"/>
+                      <a:tailEnd type="none" w="med" len="med"/>
+                    </a:lnB>
+                    <a:solidFill>
+                      <a:srgbClr val="FFFFFF"/>
+                    </a:solidFill>
+                  </a:tcPr>
+                </a:tc>
+                <a:tc>
+                  <a:txBody>
+                    <a:bodyPr/>
+                    <a:lstStyle/>
+                    <a:p>
+                      <a:pPr eaLnBrk="0" algn="ctr" indent="0" marL="0">
+                        <a:buNone/>
+                      </a:pPr>
+                      <a:r>
+                        <a:rPr lang="en-US" sz="2400" dirty="0">
+                          <a:solidFill>
+                            <a:srgbClr val="1F2937"/>
+                          </a:solidFill>
+                          <a:latin typeface="맑은 고딕" pitchFamily="34" charset="0"/>
+                          <a:ea typeface="맑은 고딕" pitchFamily="34" charset="-122"/>
+                          <a:cs typeface="맑은 고딕" pitchFamily="34" charset="-120"/>
+                        </a:rPr>
+                        <a:t>벼농사가 잘되어</a:t>
+                      </a:r>
+                      <a:endParaRPr lang="en-US" sz="2400" dirty="0">
+                        <a:latin typeface="맑은 고딕" charset="0"/>
+                        <a:ea typeface="맑은 고딕" charset="0"/>
+                        <a:cs typeface="맑은 고딕" charset="0"/>
+                      </a:endParaRPr>
+                    </a:p>
+                    <a:p>
+                      <a:pPr eaLnBrk="0" algn="ctr" indent="0" marL="0">
+                        <a:buNone/>
+                      </a:pPr>
+                      <a:r>
+                        <a:rPr lang="en-US" sz="2400" dirty="0">
+                          <a:solidFill>
+                            <a:srgbClr val="1F2937"/>
+                          </a:solidFill>
+                          <a:latin typeface="맑은 고딕" pitchFamily="34" charset="0"/>
+                          <a:ea typeface="맑은 고딕" pitchFamily="34" charset="-122"/>
+                          <a:cs typeface="맑은 고딕" pitchFamily="34" charset="-120"/>
+                        </a:rPr>
+                        <a:t>쌀로 만든 음식</a:t>
+                      </a:r>
+                      <a:endParaRPr lang="en-US" sz="2400" dirty="0">
+                        <a:latin typeface="맑은 고딕" charset="0"/>
+                        <a:ea typeface="맑은 고딕" charset="0"/>
+                        <a:cs typeface="맑은 고딕" charset="0"/>
+                      </a:endParaRPr>
+                    </a:p>
+                  </a:txBody>
+                  <a:tcPr marL="38100" marR="38100" marT="38100" marB="38100" anchor="ctr">
+                    <a:lnL w="12700" cap="flat" cmpd="sng" algn="ctr">
+                      <a:solidFill>
+                        <a:srgbClr val="94A3B8"/>
+                      </a:solidFill>
+                      <a:prstDash val="solid"/>
+                      <a:round/>
+                      <a:headEnd type="none" w="med" len="med"/>
+                      <a:tailEnd type="none" w="med" len="med"/>
+                    </a:lnL>
+                    <a:lnR w="12700" cap="flat" cmpd="sng" algn="ctr">
+                      <a:solidFill>
+                        <a:srgbClr val="94A3B8"/>
+                      </a:solidFill>
+                      <a:prstDash val="solid"/>
+                      <a:round/>
+                      <a:headEnd type="none" w="med" len="med"/>
+                      <a:tailEnd type="none" w="med" len="med"/>
+                    </a:lnR>
+                    <a:lnT w="12700" cap="flat" cmpd="sng" algn="ctr">
+                      <a:solidFill>
+                        <a:srgbClr val="94A3B8"/>
+                      </a:solidFill>
+                      <a:prstDash val="solid"/>
+                      <a:round/>
+                      <a:headEnd type="none" w="med" len="med"/>
+                      <a:tailEnd type="none" w="med" len="med"/>
+                    </a:lnT>
+                    <a:lnB w="12700" cap="flat" cmpd="sng" algn="ctr">
+                      <a:solidFill>
+                        <a:srgbClr val="94A3B8"/>
+                      </a:solidFill>
+                      <a:prstDash val="solid"/>
+                      <a:round/>
+                      <a:headEnd type="none" w="med" len="med"/>
+                      <a:tailEnd type="none" w="med" len="med"/>
+                    </a:lnB>
+                    <a:solidFill>
+                      <a:srgbClr val="FFFFFF"/>
+                    </a:solidFill>
+                  </a:tcPr>
+                </a:tc>
+              </a:tr>
+              <a:tr h="853440">
+                <a:tc>
+                  <a:txBody>
+                    <a:bodyPr/>
+                    <a:lstStyle/>
+                    <a:p>
+                      <a:pPr eaLnBrk="0" algn="ctr" indent="0" marL="0">
+                        <a:buNone/>
+                      </a:pPr>
+                      <a:r>
+                        <a:rPr lang="en-US" sz="2400" dirty="0">
+                          <a:solidFill>
+                            <a:srgbClr val="1F2937"/>
+                          </a:solidFill>
+                          <a:latin typeface="맑은 고딕" pitchFamily="34" charset="0"/>
+                          <a:ea typeface="맑은 고딕" pitchFamily="34" charset="-122"/>
+                          <a:cs typeface="맑은 고딕" pitchFamily="34" charset="-120"/>
+                        </a:rPr>
+                        <a:t>추운 곳</a:t>
+                      </a:r>
+                      <a:endParaRPr lang="en-US" sz="2400" dirty="0">
+                        <a:latin typeface="맑은 고딕" charset="0"/>
+                        <a:ea typeface="맑은 고딕" charset="0"/>
+                        <a:cs typeface="맑은 고딕" charset="0"/>
+                      </a:endParaRPr>
+                    </a:p>
+                    <a:p>
+                      <a:pPr eaLnBrk="0" algn="ctr" indent="0" marL="0">
+                        <a:buNone/>
+                      </a:pPr>
+                      <a:r>
+                        <a:rPr lang="en-US" sz="2400" dirty="0">
+                          <a:solidFill>
+                            <a:srgbClr val="1F2937"/>
+                          </a:solidFill>
+                          <a:latin typeface="맑은 고딕" pitchFamily="34" charset="0"/>
+                          <a:ea typeface="맑은 고딕" pitchFamily="34" charset="-122"/>
+                          <a:cs typeface="맑은 고딕" pitchFamily="34" charset="-120"/>
+                        </a:rPr>
+                        <a:t>(북극 가까이)</a:t>
+                      </a:r>
+                      <a:endParaRPr lang="en-US" sz="2400" dirty="0">
+                        <a:latin typeface="맑은 고딕" charset="0"/>
+                        <a:ea typeface="맑은 고딕" charset="0"/>
+                        <a:cs typeface="맑은 고딕" charset="0"/>
+                      </a:endParaRPr>
+                    </a:p>
+                  </a:txBody>
+                  <a:tcPr marL="38100" marR="38100" marT="38100" marB="38100" anchor="ctr">
+                    <a:lnL w="12700" cap="flat" cmpd="sng" algn="ctr">
+                      <a:solidFill>
+                        <a:srgbClr val="94A3B8"/>
+                      </a:solidFill>
+                      <a:prstDash val="solid"/>
+                      <a:round/>
+                      <a:headEnd type="none" w="med" len="med"/>
+                      <a:tailEnd type="none" w="med" len="med"/>
+                    </a:lnL>
+                    <a:lnR w="12700" cap="flat" cmpd="sng" algn="ctr">
+                      <a:solidFill>
+                        <a:srgbClr val="94A3B8"/>
+                      </a:solidFill>
+                      <a:prstDash val="solid"/>
+                      <a:round/>
+                      <a:headEnd type="none" w="med" len="med"/>
+                      <a:tailEnd type="none" w="med" len="med"/>
+                    </a:lnR>
+                    <a:lnT w="12700" cap="flat" cmpd="sng" algn="ctr">
+                      <a:solidFill>
+                        <a:srgbClr val="94A3B8"/>
+                      </a:solidFill>
+                      <a:prstDash val="solid"/>
+                      <a:round/>
+                      <a:headEnd type="none" w="med" len="med"/>
+                      <a:tailEnd type="none" w="med" len="med"/>
+                    </a:lnT>
+                    <a:lnB w="12700" cap="flat" cmpd="sng" algn="ctr">
+                      <a:solidFill>
+                        <a:srgbClr val="94A3B8"/>
+                      </a:solidFill>
+                      <a:prstDash val="solid"/>
+                      <a:round/>
+                      <a:headEnd type="none" w="med" len="med"/>
+                      <a:tailEnd type="none" w="med" len="med"/>
+                    </a:lnB>
+                    <a:solidFill>
+                      <a:srgbClr val="FFFFFF"/>
+                    </a:solidFill>
+                  </a:tcPr>
+                </a:tc>
+                <a:tc>
+                  <a:txBody>
+                    <a:bodyPr/>
+                    <a:lstStyle/>
+                    <a:p>
+                      <a:pPr eaLnBrk="0" algn="ctr" indent="0" marL="0">
+                        <a:buNone/>
+                      </a:pPr>
+                      <a:r>
+                        <a:rPr lang="en-US" sz="2400" dirty="0">
+                          <a:solidFill>
+                            <a:srgbClr val="1F2937"/>
+                          </a:solidFill>
+                          <a:latin typeface="맑은 고딕" pitchFamily="34" charset="0"/>
+                          <a:ea typeface="맑은 고딕" pitchFamily="34" charset="-122"/>
+                          <a:cs typeface="맑은 고딕" pitchFamily="34" charset="-120"/>
+                        </a:rPr>
+                        <a:t>동물 털가죽으로 만든</a:t>
+                      </a:r>
+                      <a:endParaRPr lang="en-US" sz="2400" dirty="0">
+                        <a:latin typeface="맑은 고딕" charset="0"/>
+                        <a:ea typeface="맑은 고딕" charset="0"/>
+                        <a:cs typeface="맑은 고딕" charset="0"/>
+                      </a:endParaRPr>
+                    </a:p>
+                    <a:p>
+                      <a:pPr eaLnBrk="0" algn="ctr" indent="0" marL="0">
+                        <a:buNone/>
+                      </a:pPr>
+                      <a:r>
+                        <a:rPr lang="en-US" sz="2400" dirty="0">
+                          <a:solidFill>
+                            <a:srgbClr val="1F2937"/>
+                          </a:solidFill>
+                          <a:latin typeface="맑은 고딕" pitchFamily="34" charset="0"/>
+                          <a:ea typeface="맑은 고딕" pitchFamily="34" charset="-122"/>
+                          <a:cs typeface="맑은 고딕" pitchFamily="34" charset="-120"/>
+                        </a:rPr>
+                        <a:t>두꺼운 옷</a:t>
+                      </a:r>
+                      <a:endParaRPr lang="en-US" sz="2400" dirty="0">
+                        <a:latin typeface="맑은 고딕" charset="0"/>
+                        <a:ea typeface="맑은 고딕" charset="0"/>
+                        <a:cs typeface="맑은 고딕" charset="0"/>
+                      </a:endParaRPr>
+                    </a:p>
+                  </a:txBody>
+                  <a:tcPr marL="38100" marR="38100" marT="38100" marB="38100" anchor="ctr">
+                    <a:lnL w="12700" cap="flat" cmpd="sng" algn="ctr">
+                      <a:solidFill>
+                        <a:srgbClr val="94A3B8"/>
+                      </a:solidFill>
+                      <a:prstDash val="solid"/>
+                      <a:round/>
+                      <a:headEnd type="none" w="med" len="med"/>
+                      <a:tailEnd type="none" w="med" len="med"/>
+                    </a:lnL>
+                    <a:lnR w="12700" cap="flat" cmpd="sng" algn="ctr">
+                      <a:solidFill>
+                        <a:srgbClr val="94A3B8"/>
+                      </a:solidFill>
+                      <a:prstDash val="solid"/>
+                      <a:round/>
+                      <a:headEnd type="none" w="med" len="med"/>
+                      <a:tailEnd type="none" w="med" len="med"/>
+                    </a:lnR>
+                    <a:lnT w="12700" cap="flat" cmpd="sng" algn="ctr">
+                      <a:solidFill>
+                        <a:srgbClr val="94A3B8"/>
+                      </a:solidFill>
+                      <a:prstDash val="solid"/>
+                      <a:round/>
+                      <a:headEnd type="none" w="med" len="med"/>
+                      <a:tailEnd type="none" w="med" len="med"/>
+                    </a:lnT>
+                    <a:lnB w="12700" cap="flat" cmpd="sng" algn="ctr">
+                      <a:solidFill>
+                        <a:srgbClr val="94A3B8"/>
+                      </a:solidFill>
+                      <a:prstDash val="solid"/>
+                      <a:round/>
+                      <a:headEnd type="none" w="med" len="med"/>
+                      <a:tailEnd type="none" w="med" len="med"/>
+                    </a:lnB>
+                    <a:solidFill>
+                      <a:srgbClr val="FFFFFF"/>
+                    </a:solidFill>
+                  </a:tcPr>
+                </a:tc>
+                <a:tc>
+                  <a:txBody>
+                    <a:bodyPr/>
+                    <a:lstStyle/>
+                    <a:p>
+                      <a:pPr eaLnBrk="0" algn="ctr" indent="0" marL="0">
+                        <a:buNone/>
+                      </a:pPr>
+                      <a:r>
+                        <a:rPr lang="en-US" sz="2400" dirty="0">
+                          <a:solidFill>
+                            <a:srgbClr val="1F2937"/>
+                          </a:solidFill>
+                          <a:latin typeface="맑은 고딕" pitchFamily="34" charset="0"/>
+                          <a:ea typeface="맑은 고딕" pitchFamily="34" charset="-122"/>
+                          <a:cs typeface="맑은 고딕" pitchFamily="34" charset="-120"/>
+                        </a:rPr>
+                        <a:t>사냥·고기잡이로</a:t>
+                      </a:r>
+                      <a:endParaRPr lang="en-US" sz="2400" dirty="0">
+                        <a:latin typeface="맑은 고딕" charset="0"/>
+                        <a:ea typeface="맑은 고딕" charset="0"/>
+                        <a:cs typeface="맑은 고딕" charset="0"/>
+                      </a:endParaRPr>
+                    </a:p>
+                    <a:p>
+                      <a:pPr eaLnBrk="0" algn="ctr" indent="0" marL="0">
+                        <a:buNone/>
+                      </a:pPr>
+                      <a:r>
+                        <a:rPr lang="en-US" sz="2400" dirty="0">
+                          <a:solidFill>
+                            <a:srgbClr val="1F2937"/>
+                          </a:solidFill>
+                          <a:latin typeface="맑은 고딕" pitchFamily="34" charset="0"/>
+                          <a:ea typeface="맑은 고딕" pitchFamily="34" charset="-122"/>
+                          <a:cs typeface="맑은 고딕" pitchFamily="34" charset="-120"/>
+                        </a:rPr>
+                        <a:t>얻은 고기와 생선</a:t>
+                      </a:r>
+                      <a:endParaRPr lang="en-US" sz="2400" dirty="0">
+                        <a:latin typeface="맑은 고딕" charset="0"/>
+                        <a:ea typeface="맑은 고딕" charset="0"/>
+                        <a:cs typeface="맑은 고딕" charset="0"/>
+                      </a:endParaRPr>
+                    </a:p>
+                  </a:txBody>
+                  <a:tcPr marL="38100" marR="38100" marT="38100" marB="38100" anchor="ctr">
+                    <a:lnL w="12700" cap="flat" cmpd="sng" algn="ctr">
+                      <a:solidFill>
+                        <a:srgbClr val="94A3B8"/>
+                      </a:solidFill>
+                      <a:prstDash val="solid"/>
+                      <a:round/>
+                      <a:headEnd type="none" w="med" len="med"/>
+                      <a:tailEnd type="none" w="med" len="med"/>
+                    </a:lnL>
+                    <a:lnR w="12700" cap="flat" cmpd="sng" algn="ctr">
+                      <a:solidFill>
+                        <a:srgbClr val="94A3B8"/>
+                      </a:solidFill>
+                      <a:prstDash val="solid"/>
+                      <a:round/>
+                      <a:headEnd type="none" w="med" len="med"/>
+                      <a:tailEnd type="none" w="med" len="med"/>
+                    </a:lnR>
+                    <a:lnT w="12700" cap="flat" cmpd="sng" algn="ctr">
+                      <a:solidFill>
+                        <a:srgbClr val="94A3B8"/>
+                      </a:solidFill>
+                      <a:prstDash val="solid"/>
+                      <a:round/>
+                      <a:headEnd type="none" w="med" len="med"/>
+                      <a:tailEnd type="none" w="med" len="med"/>
+                    </a:lnT>
+                    <a:lnB w="12700" cap="flat" cmpd="sng" algn="ctr">
+                      <a:solidFill>
+                        <a:srgbClr val="94A3B8"/>
+                      </a:solidFill>
+                      <a:prstDash val="solid"/>
+                      <a:round/>
+                      <a:headEnd type="none" w="med" len="med"/>
+                      <a:tailEnd type="none" w="med" len="med"/>
+                    </a:lnB>
+                    <a:solidFill>
+                      <a:srgbClr val="FFFFFF"/>
+                    </a:solidFill>
+                  </a:tcPr>
+                </a:tc>
+              </a:tr>
+            </a:tbl>
+          </a:graphicData>
+        </a:graphic>
+      </p:graphicFrame>
       <p:sp>
         <p:nvSpPr>
           <p:cNvPr id="25" name="Slide Number Placeholder 0"/>
@@ -12275,7 +12960,7 @@
       </p:sp>
       <p:sp>
         <p:nvSpPr>
-          <p:cNvPr id="3" name="S07-card95"/>
+          <p:cNvPr id="3" name="S07-card90"/>
           <p:cNvSpPr/>
           <p:nvPr/>
         </p:nvSpPr>
@@ -12302,7 +12987,7 @@
       </p:sp>
       <p:sp>
         <p:nvSpPr>
-          <p:cNvPr id="4" name="S07-cardtext96"/>
+          <p:cNvPr id="4" name="S07-cardtext91"/>
           <p:cNvSpPr txBox="1"/>
           <p:nvPr/>
         </p:nvSpPr>
@@ -12344,7 +13029,7 @@
       </p:sp>
       <p:sp>
         <p:nvSpPr>
-          <p:cNvPr id="5" name="S07-chip97"/>
+          <p:cNvPr id="5" name="S07-chip92"/>
           <p:cNvSpPr txBox="1"/>
           <p:nvPr/>
         </p:nvSpPr>
@@ -12391,7 +13076,7 @@
       </p:sp>
       <p:sp>
         <p:nvSpPr>
-          <p:cNvPr id="6" name="S07-text98"/>
+          <p:cNvPr id="6" name="S07-text93"/>
           <p:cNvSpPr txBox="1"/>
           <p:nvPr/>
         </p:nvSpPr>
@@ -12430,7 +13115,7 @@
       </p:sp>
       <p:sp>
         <p:nvSpPr>
-          <p:cNvPr id="7" name="S07-chip99"/>
+          <p:cNvPr id="7" name="S07-chip94"/>
           <p:cNvSpPr txBox="1"/>
           <p:nvPr/>
         </p:nvSpPr>
@@ -12477,7 +13162,7 @@
       </p:sp>
       <p:sp>
         <p:nvSpPr>
-          <p:cNvPr id="8" name="S07-text100"/>
+          <p:cNvPr id="8" name="S07-text95"/>
           <p:cNvSpPr txBox="1"/>
           <p:nvPr/>
         </p:nvSpPr>
@@ -12516,7 +13201,7 @@
       </p:sp>
       <p:sp>
         <p:nvSpPr>
-          <p:cNvPr id="9" name="S07-chip101"/>
+          <p:cNvPr id="9" name="S07-chip96"/>
           <p:cNvSpPr txBox="1"/>
           <p:nvPr/>
         </p:nvSpPr>
@@ -12563,7 +13248,7 @@
       </p:sp>
       <p:sp>
         <p:nvSpPr>
-          <p:cNvPr id="10" name="S07-text102"/>
+          <p:cNvPr id="10" name="S07-text97"/>
           <p:cNvSpPr txBox="1"/>
           <p:nvPr/>
         </p:nvSpPr>
@@ -12716,7 +13401,7 @@
       </p:sp>
       <p:sp>
         <p:nvSpPr>
-          <p:cNvPr id="3" name="S08-card103"/>
+          <p:cNvPr id="3" name="S08-card98"/>
           <p:cNvSpPr/>
           <p:nvPr/>
         </p:nvSpPr>
@@ -12743,7 +13428,7 @@
       </p:sp>
       <p:sp>
         <p:nvSpPr>
-          <p:cNvPr id="4" name="S08-cardtext104"/>
+          <p:cNvPr id="4" name="S08-cardtext99"/>
           <p:cNvSpPr txBox="1"/>
           <p:nvPr/>
         </p:nvSpPr>
@@ -12785,7 +13470,7 @@
       </p:sp>
       <p:sp>
         <p:nvSpPr>
-          <p:cNvPr id="5" name="S08-card105"/>
+          <p:cNvPr id="5" name="S08-card100"/>
           <p:cNvSpPr/>
           <p:nvPr/>
         </p:nvSpPr>
@@ -12812,7 +13497,7 @@
       </p:sp>
       <p:sp>
         <p:nvSpPr>
-          <p:cNvPr id="6" name="S08-cardtext106"/>
+          <p:cNvPr id="6" name="S08-cardtext101"/>
           <p:cNvSpPr txBox="1"/>
           <p:nvPr/>
         </p:nvSpPr>
@@ -12894,7 +13579,7 @@
       </p:sp>
       <p:sp>
         <p:nvSpPr>
-          <p:cNvPr id="7" name="S08-card107"/>
+          <p:cNvPr id="7" name="S08-card102"/>
           <p:cNvSpPr/>
           <p:nvPr/>
         </p:nvSpPr>
@@ -12921,7 +13606,7 @@
       </p:sp>
       <p:sp>
         <p:nvSpPr>
-          <p:cNvPr id="8" name="S08-cardtext108"/>
+          <p:cNvPr id="8" name="S08-cardtext103"/>
           <p:cNvSpPr txBox="1"/>
           <p:nvPr/>
         </p:nvSpPr>
@@ -13003,7 +13688,7 @@
       </p:sp>
       <p:sp>
         <p:nvSpPr>
-          <p:cNvPr id="9" name="S08-card109"/>
+          <p:cNvPr id="9" name="S08-card104"/>
           <p:cNvSpPr/>
           <p:nvPr/>
         </p:nvSpPr>
@@ -13030,7 +13715,7 @@
       </p:sp>
       <p:sp>
         <p:nvSpPr>
-          <p:cNvPr id="10" name="S08-cardtext110"/>
+          <p:cNvPr id="10" name="S08-cardtext105"/>
           <p:cNvSpPr txBox="1"/>
           <p:nvPr/>
         </p:nvSpPr>
@@ -13226,7 +13911,7 @@
       </p:sp>
       <p:sp>
         <p:nvSpPr>
-          <p:cNvPr id="3" name="S09-card111"/>
+          <p:cNvPr id="3" name="S09-card106"/>
           <p:cNvSpPr/>
           <p:nvPr/>
         </p:nvSpPr>
@@ -13253,7 +13938,7 @@
       </p:sp>
       <p:sp>
         <p:nvSpPr>
-          <p:cNvPr id="4" name="S09-cardtext112"/>
+          <p:cNvPr id="4" name="S09-cardtext107"/>
           <p:cNvSpPr txBox="1"/>
           <p:nvPr/>
         </p:nvSpPr>
@@ -13295,7 +13980,7 @@
       </p:sp>
       <p:sp>
         <p:nvSpPr>
-          <p:cNvPr id="5" name="S09-card113"/>
+          <p:cNvPr id="5" name="S09-card108"/>
           <p:cNvSpPr/>
           <p:nvPr/>
         </p:nvSpPr>
@@ -13322,7 +14007,7 @@
       </p:sp>
       <p:sp>
         <p:nvSpPr>
-          <p:cNvPr id="6" name="S09-cardtext114"/>
+          <p:cNvPr id="6" name="S09-cardtext109"/>
           <p:cNvSpPr txBox="1"/>
           <p:nvPr/>
         </p:nvSpPr>
@@ -13364,7 +14049,7 @@
       </p:sp>
       <p:sp>
         <p:nvSpPr>
-          <p:cNvPr id="7" name="S09-chip115"/>
+          <p:cNvPr id="7" name="S09-chip110"/>
           <p:cNvSpPr txBox="1"/>
           <p:nvPr/>
         </p:nvSpPr>
@@ -13411,7 +14096,7 @@
       </p:sp>
       <p:sp>
         <p:nvSpPr>
-          <p:cNvPr id="8" name="S09-text116"/>
+          <p:cNvPr id="8" name="S09-text111"/>
           <p:cNvSpPr txBox="1"/>
           <p:nvPr/>
         </p:nvSpPr>
@@ -13484,7 +14169,7 @@
       </p:sp>
       <p:sp>
         <p:nvSpPr>
-          <p:cNvPr id="9" name="S09-chip117"/>
+          <p:cNvPr id="9" name="S09-chip112"/>
           <p:cNvSpPr txBox="1"/>
           <p:nvPr/>
         </p:nvSpPr>
@@ -13531,7 +14216,7 @@
       </p:sp>
       <p:sp>
         <p:nvSpPr>
-          <p:cNvPr id="10" name="S09-text118"/>
+          <p:cNvPr id="10" name="S09-text113"/>
           <p:cNvSpPr txBox="1"/>
           <p:nvPr/>
         </p:nvSpPr>
